--- a/docs/pptx/auc3/ritu-auc3-linsubhr-dosedisc-anemia2.pptx
+++ b/docs/pptx/auc3/ritu-auc3-linsubhr-dosedisc-anemia2.pptx
@@ -2443,7 +2443,7 @@
           </p:nvSpPr>
           <p:spPr>
             <a:xfrm>
-              <a:off x="980186" y="1896563"/>
+              <a:off x="980739" y="1896563"/>
               <a:ext cx="0" cy="3826579"/>
             </a:xfrm>
             <a:custGeom>
@@ -2486,7 +2486,7 @@
           </p:nvSpPr>
           <p:spPr>
             <a:xfrm>
-              <a:off x="3262630" y="1896563"/>
+              <a:off x="3260798" y="1896563"/>
               <a:ext cx="0" cy="3826579"/>
             </a:xfrm>
             <a:custGeom>
@@ -2529,7 +2529,7 @@
           </p:nvSpPr>
           <p:spPr>
             <a:xfrm>
-              <a:off x="5545073" y="1896563"/>
+              <a:off x="5540858" y="1896563"/>
               <a:ext cx="0" cy="3826579"/>
             </a:xfrm>
             <a:custGeom>
@@ -2572,7 +2572,7 @@
           </p:nvSpPr>
           <p:spPr>
             <a:xfrm>
-              <a:off x="7827517" y="1896563"/>
+              <a:off x="7820918" y="1896563"/>
               <a:ext cx="0" cy="3826579"/>
             </a:xfrm>
             <a:custGeom>
@@ -2830,7 +2830,7 @@
           </p:nvSpPr>
           <p:spPr>
             <a:xfrm>
-              <a:off x="2121408" y="1896563"/>
+              <a:off x="2120768" y="1896563"/>
               <a:ext cx="0" cy="3826579"/>
             </a:xfrm>
             <a:custGeom>
@@ -2873,7 +2873,7 @@
           </p:nvSpPr>
           <p:spPr>
             <a:xfrm>
-              <a:off x="4403852" y="1896563"/>
+              <a:off x="4400828" y="1896563"/>
               <a:ext cx="0" cy="3826579"/>
             </a:xfrm>
             <a:custGeom>
@@ -2916,7 +2916,7 @@
           </p:nvSpPr>
           <p:spPr>
             <a:xfrm>
-              <a:off x="6686295" y="1896563"/>
+              <a:off x="6680888" y="1896563"/>
               <a:ext cx="0" cy="3826579"/>
             </a:xfrm>
             <a:custGeom>
@@ -2960,605 +2960,596 @@
           <p:spPr>
             <a:xfrm>
               <a:off x="1172049" y="1896563"/>
-              <a:ext cx="7090630" cy="3408233"/>
+              <a:ext cx="7090630" cy="3417052"/>
             </a:xfrm>
             <a:custGeom>
               <a:avLst/>
               <a:pathLst>
-                <a:path w="7090630" h="3408233">
+                <a:path w="7090630" h="3417052">
                   <a:moveTo>
-                    <a:pt x="0" y="2651791"/>
+                    <a:pt x="0" y="2692770"/>
                   </a:moveTo>
                   <a:lnTo>
-                    <a:pt x="71622" y="2654930"/>
-                  </a:lnTo>
-                  <a:lnTo>
-                    <a:pt x="143245" y="2658060"/>
-                  </a:lnTo>
-                  <a:lnTo>
-                    <a:pt x="214867" y="2661180"/>
-                  </a:lnTo>
-                  <a:lnTo>
-                    <a:pt x="286490" y="2664290"/>
-                  </a:lnTo>
-                  <a:lnTo>
-                    <a:pt x="358112" y="2667391"/>
-                  </a:lnTo>
-                  <a:lnTo>
-                    <a:pt x="429735" y="2670482"/>
-                  </a:lnTo>
-                  <a:lnTo>
-                    <a:pt x="501357" y="2673563"/>
-                  </a:lnTo>
-                  <a:lnTo>
-                    <a:pt x="572980" y="2676634"/>
-                  </a:lnTo>
-                  <a:lnTo>
-                    <a:pt x="644602" y="2679696"/>
-                  </a:lnTo>
-                  <a:lnTo>
-                    <a:pt x="716225" y="2682748"/>
-                  </a:lnTo>
-                  <a:lnTo>
-                    <a:pt x="787847" y="2685790"/>
-                  </a:lnTo>
-                  <a:lnTo>
-                    <a:pt x="859470" y="2688823"/>
-                  </a:lnTo>
-                  <a:lnTo>
-                    <a:pt x="931092" y="2691847"/>
-                  </a:lnTo>
-                  <a:lnTo>
-                    <a:pt x="1002715" y="2694861"/>
-                  </a:lnTo>
-                  <a:lnTo>
-                    <a:pt x="1074337" y="2697865"/>
-                  </a:lnTo>
-                  <a:lnTo>
-                    <a:pt x="1145960" y="2700860"/>
-                  </a:lnTo>
-                  <a:lnTo>
-                    <a:pt x="1217582" y="2703846"/>
-                  </a:lnTo>
-                  <a:lnTo>
-                    <a:pt x="1289205" y="2706823"/>
-                  </a:lnTo>
-                  <a:lnTo>
-                    <a:pt x="1360827" y="2709790"/>
-                  </a:lnTo>
-                  <a:lnTo>
-                    <a:pt x="1432450" y="2712747"/>
-                  </a:lnTo>
-                  <a:lnTo>
-                    <a:pt x="1504073" y="2715696"/>
-                  </a:lnTo>
-                  <a:lnTo>
-                    <a:pt x="1575695" y="2718635"/>
-                  </a:lnTo>
-                  <a:lnTo>
-                    <a:pt x="1647318" y="2721565"/>
-                  </a:lnTo>
-                  <a:lnTo>
-                    <a:pt x="1718940" y="2724486"/>
-                  </a:lnTo>
-                  <a:lnTo>
-                    <a:pt x="1790563" y="2727397"/>
-                  </a:lnTo>
-                  <a:lnTo>
-                    <a:pt x="1862185" y="2730300"/>
-                  </a:lnTo>
-                  <a:lnTo>
-                    <a:pt x="1933808" y="2733193"/>
-                  </a:lnTo>
-                  <a:lnTo>
-                    <a:pt x="2005430" y="2736077"/>
-                  </a:lnTo>
-                  <a:lnTo>
-                    <a:pt x="2077053" y="2738953"/>
-                  </a:lnTo>
-                  <a:lnTo>
-                    <a:pt x="2148675" y="2741819"/>
-                  </a:lnTo>
-                  <a:lnTo>
-                    <a:pt x="2220298" y="2744676"/>
-                  </a:lnTo>
-                  <a:lnTo>
-                    <a:pt x="2291920" y="2747524"/>
-                  </a:lnTo>
-                  <a:lnTo>
-                    <a:pt x="2363543" y="2750364"/>
-                  </a:lnTo>
-                  <a:lnTo>
-                    <a:pt x="2435165" y="2753194"/>
-                  </a:lnTo>
-                  <a:lnTo>
-                    <a:pt x="2506788" y="2756016"/>
-                  </a:lnTo>
-                  <a:lnTo>
-                    <a:pt x="2578410" y="2758828"/>
-                  </a:lnTo>
-                  <a:lnTo>
-                    <a:pt x="2650033" y="2761632"/>
-                  </a:lnTo>
-                  <a:lnTo>
-                    <a:pt x="2721655" y="2764427"/>
-                  </a:lnTo>
-                  <a:lnTo>
-                    <a:pt x="2793278" y="2767214"/>
-                  </a:lnTo>
-                  <a:lnTo>
-                    <a:pt x="2864901" y="2769991"/>
-                  </a:lnTo>
-                  <a:lnTo>
-                    <a:pt x="2936523" y="2772760"/>
-                  </a:lnTo>
-                  <a:lnTo>
-                    <a:pt x="3008146" y="2775520"/>
-                  </a:lnTo>
-                  <a:lnTo>
-                    <a:pt x="3079768" y="2778272"/>
-                  </a:lnTo>
-                  <a:lnTo>
-                    <a:pt x="3151391" y="2781015"/>
-                  </a:lnTo>
-                  <a:lnTo>
-                    <a:pt x="3223013" y="2775862"/>
-                  </a:lnTo>
-                  <a:lnTo>
-                    <a:pt x="3294636" y="2750616"/>
-                  </a:lnTo>
-                  <a:lnTo>
-                    <a:pt x="3366258" y="2724644"/>
-                  </a:lnTo>
-                  <a:lnTo>
-                    <a:pt x="3437881" y="2697923"/>
-                  </a:lnTo>
-                  <a:lnTo>
-                    <a:pt x="3509503" y="2670433"/>
-                  </a:lnTo>
-                  <a:lnTo>
-                    <a:pt x="3581126" y="2642152"/>
-                  </a:lnTo>
-                  <a:lnTo>
-                    <a:pt x="3652748" y="2613056"/>
-                  </a:lnTo>
-                  <a:lnTo>
-                    <a:pt x="3724371" y="2583123"/>
-                  </a:lnTo>
-                  <a:lnTo>
-                    <a:pt x="3795993" y="2552327"/>
-                  </a:lnTo>
-                  <a:lnTo>
-                    <a:pt x="3867616" y="2520645"/>
-                  </a:lnTo>
-                  <a:lnTo>
-                    <a:pt x="3939238" y="2488051"/>
-                  </a:lnTo>
-                  <a:lnTo>
-                    <a:pt x="4010861" y="2454518"/>
-                  </a:lnTo>
-                  <a:lnTo>
-                    <a:pt x="4082483" y="2420020"/>
-                  </a:lnTo>
-                  <a:lnTo>
-                    <a:pt x="4154106" y="2384528"/>
-                  </a:lnTo>
-                  <a:lnTo>
-                    <a:pt x="4225729" y="2348014"/>
-                  </a:lnTo>
-                  <a:lnTo>
-                    <a:pt x="4297351" y="2310449"/>
-                  </a:lnTo>
-                  <a:lnTo>
-                    <a:pt x="4368974" y="2271802"/>
-                  </a:lnTo>
-                  <a:lnTo>
-                    <a:pt x="4440596" y="2232043"/>
-                  </a:lnTo>
-                  <a:lnTo>
-                    <a:pt x="4512219" y="2191139"/>
-                  </a:lnTo>
-                  <a:lnTo>
-                    <a:pt x="4583841" y="2149057"/>
-                  </a:lnTo>
-                  <a:lnTo>
-                    <a:pt x="4655464" y="2105763"/>
-                  </a:lnTo>
-                  <a:lnTo>
-                    <a:pt x="4727086" y="2061223"/>
-                  </a:lnTo>
-                  <a:lnTo>
-                    <a:pt x="4798709" y="2015400"/>
-                  </a:lnTo>
-                  <a:lnTo>
-                    <a:pt x="4870331" y="1968258"/>
-                  </a:lnTo>
-                  <a:lnTo>
-                    <a:pt x="4941954" y="1919758"/>
-                  </a:lnTo>
-                  <a:lnTo>
-                    <a:pt x="5013576" y="1869862"/>
-                  </a:lnTo>
-                  <a:lnTo>
-                    <a:pt x="5085199" y="1818529"/>
-                  </a:lnTo>
-                  <a:lnTo>
-                    <a:pt x="5156821" y="1765718"/>
-                  </a:lnTo>
-                  <a:lnTo>
-                    <a:pt x="5228444" y="1711387"/>
-                  </a:lnTo>
-                  <a:lnTo>
-                    <a:pt x="5300066" y="1655491"/>
-                  </a:lnTo>
-                  <a:lnTo>
-                    <a:pt x="5371689" y="1597986"/>
-                  </a:lnTo>
-                  <a:lnTo>
-                    <a:pt x="5443311" y="1538825"/>
-                  </a:lnTo>
-                  <a:lnTo>
-                    <a:pt x="5514934" y="1477960"/>
-                  </a:lnTo>
-                  <a:lnTo>
-                    <a:pt x="5586557" y="1415343"/>
-                  </a:lnTo>
-                  <a:lnTo>
-                    <a:pt x="5658179" y="1350923"/>
-                  </a:lnTo>
-                  <a:lnTo>
-                    <a:pt x="5729802" y="1284648"/>
-                  </a:lnTo>
-                  <a:lnTo>
-                    <a:pt x="5801424" y="1216465"/>
-                  </a:lnTo>
-                  <a:lnTo>
-                    <a:pt x="5873047" y="1146318"/>
-                  </a:lnTo>
-                  <a:lnTo>
-                    <a:pt x="5944669" y="1074152"/>
-                  </a:lnTo>
-                  <a:lnTo>
-                    <a:pt x="6016292" y="999908"/>
-                  </a:lnTo>
-                  <a:lnTo>
-                    <a:pt x="6087914" y="923526"/>
-                  </a:lnTo>
-                  <a:lnTo>
-                    <a:pt x="6159537" y="844945"/>
-                  </a:lnTo>
-                  <a:lnTo>
-                    <a:pt x="6231159" y="764101"/>
-                  </a:lnTo>
-                  <a:lnTo>
-                    <a:pt x="6302782" y="680929"/>
-                  </a:lnTo>
-                  <a:lnTo>
-                    <a:pt x="6374404" y="595363"/>
-                  </a:lnTo>
-                  <a:lnTo>
-                    <a:pt x="6446027" y="507333"/>
-                  </a:lnTo>
-                  <a:lnTo>
-                    <a:pt x="6517649" y="416768"/>
-                  </a:lnTo>
-                  <a:lnTo>
-                    <a:pt x="6589272" y="323595"/>
-                  </a:lnTo>
-                  <a:lnTo>
-                    <a:pt x="6660894" y="227739"/>
-                  </a:lnTo>
-                  <a:lnTo>
-                    <a:pt x="6732517" y="129124"/>
-                  </a:lnTo>
-                  <a:lnTo>
-                    <a:pt x="6804139" y="27669"/>
-                  </a:lnTo>
-                  <a:lnTo>
-                    <a:pt x="6823126" y="0"/>
+                    <a:pt x="71622" y="2694914"/>
+                  </a:lnTo>
+                  <a:lnTo>
+                    <a:pt x="143245" y="2697052"/>
+                  </a:lnTo>
+                  <a:lnTo>
+                    <a:pt x="214867" y="2699185"/>
+                  </a:lnTo>
+                  <a:lnTo>
+                    <a:pt x="286490" y="2701314"/>
+                  </a:lnTo>
+                  <a:lnTo>
+                    <a:pt x="358112" y="2703438"/>
+                  </a:lnTo>
+                  <a:lnTo>
+                    <a:pt x="429735" y="2705557"/>
+                  </a:lnTo>
+                  <a:lnTo>
+                    <a:pt x="501357" y="2707672"/>
+                  </a:lnTo>
+                  <a:lnTo>
+                    <a:pt x="572980" y="2709782"/>
+                  </a:lnTo>
+                  <a:lnTo>
+                    <a:pt x="644602" y="2711887"/>
+                  </a:lnTo>
+                  <a:lnTo>
+                    <a:pt x="716225" y="2713987"/>
+                  </a:lnTo>
+                  <a:lnTo>
+                    <a:pt x="787847" y="2716083"/>
+                  </a:lnTo>
+                  <a:lnTo>
+                    <a:pt x="859470" y="2718174"/>
+                  </a:lnTo>
+                  <a:lnTo>
+                    <a:pt x="931092" y="2720260"/>
+                  </a:lnTo>
+                  <a:lnTo>
+                    <a:pt x="1002715" y="2722342"/>
+                  </a:lnTo>
+                  <a:lnTo>
+                    <a:pt x="1074337" y="2724419"/>
+                  </a:lnTo>
+                  <a:lnTo>
+                    <a:pt x="1145960" y="2726492"/>
+                  </a:lnTo>
+                  <a:lnTo>
+                    <a:pt x="1217582" y="2728559"/>
+                  </a:lnTo>
+                  <a:lnTo>
+                    <a:pt x="1289205" y="2730623"/>
+                  </a:lnTo>
+                  <a:lnTo>
+                    <a:pt x="1360827" y="2732681"/>
+                  </a:lnTo>
+                  <a:lnTo>
+                    <a:pt x="1432450" y="2734735"/>
+                  </a:lnTo>
+                  <a:lnTo>
+                    <a:pt x="1504073" y="2736784"/>
+                  </a:lnTo>
+                  <a:lnTo>
+                    <a:pt x="1575695" y="2738829"/>
+                  </a:lnTo>
+                  <a:lnTo>
+                    <a:pt x="1647318" y="2740870"/>
+                  </a:lnTo>
+                  <a:lnTo>
+                    <a:pt x="1718940" y="2742905"/>
+                  </a:lnTo>
+                  <a:lnTo>
+                    <a:pt x="1790563" y="2744936"/>
+                  </a:lnTo>
+                  <a:lnTo>
+                    <a:pt x="1862185" y="2746963"/>
+                  </a:lnTo>
+                  <a:lnTo>
+                    <a:pt x="1933808" y="2748985"/>
+                  </a:lnTo>
+                  <a:lnTo>
+                    <a:pt x="2005430" y="2751003"/>
+                  </a:lnTo>
+                  <a:lnTo>
+                    <a:pt x="2077053" y="2753016"/>
+                  </a:lnTo>
+                  <a:lnTo>
+                    <a:pt x="2148675" y="2755024"/>
+                  </a:lnTo>
+                  <a:lnTo>
+                    <a:pt x="2220298" y="2757028"/>
+                  </a:lnTo>
+                  <a:lnTo>
+                    <a:pt x="2291920" y="2759028"/>
+                  </a:lnTo>
+                  <a:lnTo>
+                    <a:pt x="2363543" y="2761023"/>
+                  </a:lnTo>
+                  <a:lnTo>
+                    <a:pt x="2435165" y="2763014"/>
+                  </a:lnTo>
+                  <a:lnTo>
+                    <a:pt x="2506788" y="2765000"/>
+                  </a:lnTo>
+                  <a:lnTo>
+                    <a:pt x="2578410" y="2766982"/>
+                  </a:lnTo>
+                  <a:lnTo>
+                    <a:pt x="2650033" y="2768959"/>
+                  </a:lnTo>
+                  <a:lnTo>
+                    <a:pt x="2721655" y="2770932"/>
+                  </a:lnTo>
+                  <a:lnTo>
+                    <a:pt x="2793278" y="2772901"/>
+                  </a:lnTo>
+                  <a:lnTo>
+                    <a:pt x="2864901" y="2774865"/>
+                  </a:lnTo>
+                  <a:lnTo>
+                    <a:pt x="2936523" y="2776825"/>
+                  </a:lnTo>
+                  <a:lnTo>
+                    <a:pt x="3008146" y="2778780"/>
+                  </a:lnTo>
+                  <a:lnTo>
+                    <a:pt x="3079768" y="2780731"/>
+                  </a:lnTo>
+                  <a:lnTo>
+                    <a:pt x="3151391" y="2782678"/>
+                  </a:lnTo>
+                  <a:lnTo>
+                    <a:pt x="3223013" y="2760774"/>
+                  </a:lnTo>
+                  <a:lnTo>
+                    <a:pt x="3294636" y="2733996"/>
+                  </a:lnTo>
+                  <a:lnTo>
+                    <a:pt x="3366258" y="2706414"/>
+                  </a:lnTo>
+                  <a:lnTo>
+                    <a:pt x="3437881" y="2678004"/>
+                  </a:lnTo>
+                  <a:lnTo>
+                    <a:pt x="3509503" y="2648741"/>
+                  </a:lnTo>
+                  <a:lnTo>
+                    <a:pt x="3581126" y="2618599"/>
+                  </a:lnTo>
+                  <a:lnTo>
+                    <a:pt x="3652748" y="2587552"/>
+                  </a:lnTo>
+                  <a:lnTo>
+                    <a:pt x="3724371" y="2555573"/>
+                  </a:lnTo>
+                  <a:lnTo>
+                    <a:pt x="3795993" y="2522634"/>
+                  </a:lnTo>
+                  <a:lnTo>
+                    <a:pt x="3867616" y="2488706"/>
+                  </a:lnTo>
+                  <a:lnTo>
+                    <a:pt x="3939238" y="2453759"/>
+                  </a:lnTo>
+                  <a:lnTo>
+                    <a:pt x="4010861" y="2417763"/>
+                  </a:lnTo>
+                  <a:lnTo>
+                    <a:pt x="4082483" y="2380686"/>
+                  </a:lnTo>
+                  <a:lnTo>
+                    <a:pt x="4154106" y="2342496"/>
+                  </a:lnTo>
+                  <a:lnTo>
+                    <a:pt x="4225729" y="2303160"/>
+                  </a:lnTo>
+                  <a:lnTo>
+                    <a:pt x="4297351" y="2262642"/>
+                  </a:lnTo>
+                  <a:lnTo>
+                    <a:pt x="4368974" y="2220908"/>
+                  </a:lnTo>
+                  <a:lnTo>
+                    <a:pt x="4440596" y="2177920"/>
+                  </a:lnTo>
+                  <a:lnTo>
+                    <a:pt x="4512219" y="2133642"/>
+                  </a:lnTo>
+                  <a:lnTo>
+                    <a:pt x="4583841" y="2088035"/>
+                  </a:lnTo>
+                  <a:lnTo>
+                    <a:pt x="4655464" y="2041058"/>
+                  </a:lnTo>
+                  <a:lnTo>
+                    <a:pt x="4727086" y="1992671"/>
+                  </a:lnTo>
+                  <a:lnTo>
+                    <a:pt x="4798709" y="1942831"/>
+                  </a:lnTo>
+                  <a:lnTo>
+                    <a:pt x="4870331" y="1891495"/>
+                  </a:lnTo>
+                  <a:lnTo>
+                    <a:pt x="4941954" y="1838617"/>
+                  </a:lnTo>
+                  <a:lnTo>
+                    <a:pt x="5013576" y="1784151"/>
+                  </a:lnTo>
+                  <a:lnTo>
+                    <a:pt x="5085199" y="1728051"/>
+                  </a:lnTo>
+                  <a:lnTo>
+                    <a:pt x="5156821" y="1670266"/>
+                  </a:lnTo>
+                  <a:lnTo>
+                    <a:pt x="5228444" y="1610746"/>
+                  </a:lnTo>
+                  <a:lnTo>
+                    <a:pt x="5300066" y="1549438"/>
+                  </a:lnTo>
+                  <a:lnTo>
+                    <a:pt x="5371689" y="1486290"/>
+                  </a:lnTo>
+                  <a:lnTo>
+                    <a:pt x="5443311" y="1421247"/>
+                  </a:lnTo>
+                  <a:lnTo>
+                    <a:pt x="5514934" y="1354250"/>
+                  </a:lnTo>
+                  <a:lnTo>
+                    <a:pt x="5586557" y="1285241"/>
+                  </a:lnTo>
+                  <a:lnTo>
+                    <a:pt x="5658179" y="1214161"/>
+                  </a:lnTo>
+                  <a:lnTo>
+                    <a:pt x="5729802" y="1140947"/>
+                  </a:lnTo>
+                  <a:lnTo>
+                    <a:pt x="5801424" y="1065534"/>
+                  </a:lnTo>
+                  <a:lnTo>
+                    <a:pt x="5873047" y="987857"/>
+                  </a:lnTo>
+                  <a:lnTo>
+                    <a:pt x="5944669" y="907848"/>
+                  </a:lnTo>
+                  <a:lnTo>
+                    <a:pt x="6016292" y="825436"/>
+                  </a:lnTo>
+                  <a:lnTo>
+                    <a:pt x="6087914" y="740551"/>
+                  </a:lnTo>
+                  <a:lnTo>
+                    <a:pt x="6159537" y="653116"/>
+                  </a:lnTo>
+                  <a:lnTo>
+                    <a:pt x="6231159" y="563057"/>
+                  </a:lnTo>
+                  <a:lnTo>
+                    <a:pt x="6302782" y="470293"/>
+                  </a:lnTo>
+                  <a:lnTo>
+                    <a:pt x="6374404" y="374744"/>
+                  </a:lnTo>
+                  <a:lnTo>
+                    <a:pt x="6446027" y="276327"/>
+                  </a:lnTo>
+                  <a:lnTo>
+                    <a:pt x="6517649" y="174954"/>
+                  </a:lnTo>
+                  <a:lnTo>
+                    <a:pt x="6589272" y="70538"/>
+                  </a:lnTo>
+                  <a:lnTo>
+                    <a:pt x="6636246" y="0"/>
                   </a:lnTo>
                   <a:lnTo>
                     <a:pt x="7090630" y="0"/>
                   </a:lnTo>
                   <a:lnTo>
-                    <a:pt x="7090630" y="2919341"/>
-                  </a:lnTo>
-                  <a:lnTo>
-                    <a:pt x="7019007" y="2917033"/>
-                  </a:lnTo>
-                  <a:lnTo>
-                    <a:pt x="6947385" y="2914718"/>
-                  </a:lnTo>
-                  <a:lnTo>
-                    <a:pt x="6875762" y="2912396"/>
-                  </a:lnTo>
-                  <a:lnTo>
-                    <a:pt x="6804139" y="2910067"/>
-                  </a:lnTo>
-                  <a:lnTo>
-                    <a:pt x="6732517" y="2907730"/>
-                  </a:lnTo>
-                  <a:lnTo>
-                    <a:pt x="6660894" y="2905386"/>
-                  </a:lnTo>
-                  <a:lnTo>
-                    <a:pt x="6589272" y="2903034"/>
-                  </a:lnTo>
-                  <a:lnTo>
-                    <a:pt x="6517649" y="2900675"/>
-                  </a:lnTo>
-                  <a:lnTo>
-                    <a:pt x="6446027" y="2898309"/>
-                  </a:lnTo>
-                  <a:lnTo>
-                    <a:pt x="6374404" y="2895935"/>
-                  </a:lnTo>
-                  <a:lnTo>
-                    <a:pt x="6302782" y="2893554"/>
-                  </a:lnTo>
-                  <a:lnTo>
-                    <a:pt x="6231159" y="2891165"/>
-                  </a:lnTo>
-                  <a:lnTo>
-                    <a:pt x="6159537" y="2888769"/>
-                  </a:lnTo>
-                  <a:lnTo>
-                    <a:pt x="6087914" y="2886365"/>
-                  </a:lnTo>
-                  <a:lnTo>
-                    <a:pt x="6016292" y="2883954"/>
-                  </a:lnTo>
-                  <a:lnTo>
-                    <a:pt x="5944669" y="2881535"/>
-                  </a:lnTo>
-                  <a:lnTo>
-                    <a:pt x="5873047" y="2879108"/>
-                  </a:lnTo>
-                  <a:lnTo>
-                    <a:pt x="5801424" y="2876674"/>
-                  </a:lnTo>
-                  <a:lnTo>
-                    <a:pt x="5729802" y="2874232"/>
-                  </a:lnTo>
-                  <a:lnTo>
-                    <a:pt x="5658179" y="2871783"/>
-                  </a:lnTo>
-                  <a:lnTo>
-                    <a:pt x="5586557" y="2869325"/>
-                  </a:lnTo>
-                  <a:lnTo>
-                    <a:pt x="5514934" y="2866860"/>
-                  </a:lnTo>
-                  <a:lnTo>
-                    <a:pt x="5443311" y="2864388"/>
-                  </a:lnTo>
-                  <a:lnTo>
-                    <a:pt x="5371689" y="2861907"/>
-                  </a:lnTo>
-                  <a:lnTo>
-                    <a:pt x="5300066" y="2859419"/>
-                  </a:lnTo>
-                  <a:lnTo>
-                    <a:pt x="5228444" y="2856923"/>
-                  </a:lnTo>
-                  <a:lnTo>
-                    <a:pt x="5156821" y="2854419"/>
-                  </a:lnTo>
-                  <a:lnTo>
-                    <a:pt x="5085199" y="2851907"/>
-                  </a:lnTo>
-                  <a:lnTo>
-                    <a:pt x="5013576" y="2849387"/>
-                  </a:lnTo>
-                  <a:lnTo>
-                    <a:pt x="4941954" y="2846859"/>
-                  </a:lnTo>
-                  <a:lnTo>
-                    <a:pt x="4870331" y="2844324"/>
-                  </a:lnTo>
-                  <a:lnTo>
-                    <a:pt x="4798709" y="2841780"/>
-                  </a:lnTo>
-                  <a:lnTo>
-                    <a:pt x="4727086" y="2839228"/>
-                  </a:lnTo>
-                  <a:lnTo>
-                    <a:pt x="4655464" y="2836669"/>
-                  </a:lnTo>
-                  <a:lnTo>
-                    <a:pt x="4583841" y="2834101"/>
-                  </a:lnTo>
-                  <a:lnTo>
-                    <a:pt x="4512219" y="2831525"/>
-                  </a:lnTo>
-                  <a:lnTo>
-                    <a:pt x="4440596" y="2828941"/>
-                  </a:lnTo>
-                  <a:lnTo>
-                    <a:pt x="4368974" y="2826349"/>
-                  </a:lnTo>
-                  <a:lnTo>
-                    <a:pt x="4297351" y="2823749"/>
-                  </a:lnTo>
-                  <a:lnTo>
-                    <a:pt x="4225729" y="2821140"/>
-                  </a:lnTo>
-                  <a:lnTo>
-                    <a:pt x="4154106" y="2818524"/>
-                  </a:lnTo>
-                  <a:lnTo>
-                    <a:pt x="4082483" y="2815899"/>
-                  </a:lnTo>
-                  <a:lnTo>
-                    <a:pt x="4010861" y="2813266"/>
-                  </a:lnTo>
-                  <a:lnTo>
-                    <a:pt x="3939238" y="2810624"/>
-                  </a:lnTo>
-                  <a:lnTo>
-                    <a:pt x="3867616" y="2807975"/>
-                  </a:lnTo>
-                  <a:lnTo>
-                    <a:pt x="3795993" y="2805317"/>
-                  </a:lnTo>
-                  <a:lnTo>
-                    <a:pt x="3724371" y="2802650"/>
-                  </a:lnTo>
-                  <a:lnTo>
-                    <a:pt x="3652748" y="2799975"/>
-                  </a:lnTo>
-                  <a:lnTo>
-                    <a:pt x="3581126" y="2797292"/>
-                  </a:lnTo>
-                  <a:lnTo>
-                    <a:pt x="3509503" y="2794601"/>
-                  </a:lnTo>
-                  <a:lnTo>
-                    <a:pt x="3437881" y="2791900"/>
-                  </a:lnTo>
-                  <a:lnTo>
-                    <a:pt x="3366258" y="2789192"/>
-                  </a:lnTo>
-                  <a:lnTo>
-                    <a:pt x="3294636" y="2786475"/>
-                  </a:lnTo>
-                  <a:lnTo>
-                    <a:pt x="3223013" y="2783749"/>
-                  </a:lnTo>
-                  <a:lnTo>
-                    <a:pt x="3151391" y="2800401"/>
-                  </a:lnTo>
-                  <a:lnTo>
-                    <a:pt x="3079768" y="2824254"/>
-                  </a:lnTo>
-                  <a:lnTo>
-                    <a:pt x="3008146" y="2847438"/>
-                  </a:lnTo>
-                  <a:lnTo>
-                    <a:pt x="2936523" y="2869974"/>
-                  </a:lnTo>
-                  <a:lnTo>
-                    <a:pt x="2864901" y="2891879"/>
-                  </a:lnTo>
-                  <a:lnTo>
-                    <a:pt x="2793278" y="2913172"/>
-                  </a:lnTo>
-                  <a:lnTo>
-                    <a:pt x="2721655" y="2933868"/>
-                  </a:lnTo>
-                  <a:lnTo>
-                    <a:pt x="2650033" y="2953985"/>
-                  </a:lnTo>
-                  <a:lnTo>
-                    <a:pt x="2578410" y="2973539"/>
-                  </a:lnTo>
-                  <a:lnTo>
-                    <a:pt x="2506788" y="2992545"/>
-                  </a:lnTo>
-                  <a:lnTo>
-                    <a:pt x="2435165" y="3011020"/>
-                  </a:lnTo>
-                  <a:lnTo>
-                    <a:pt x="2363543" y="3028977"/>
-                  </a:lnTo>
-                  <a:lnTo>
-                    <a:pt x="2291920" y="3046432"/>
-                  </a:lnTo>
-                  <a:lnTo>
-                    <a:pt x="2220298" y="3063399"/>
-                  </a:lnTo>
-                  <a:lnTo>
-                    <a:pt x="2148675" y="3079891"/>
-                  </a:lnTo>
-                  <a:lnTo>
-                    <a:pt x="2077053" y="3095921"/>
-                  </a:lnTo>
-                  <a:lnTo>
-                    <a:pt x="2005430" y="3111502"/>
-                  </a:lnTo>
-                  <a:lnTo>
-                    <a:pt x="1933808" y="3126647"/>
-                  </a:lnTo>
-                  <a:lnTo>
-                    <a:pt x="1862185" y="3141369"/>
-                  </a:lnTo>
-                  <a:lnTo>
-                    <a:pt x="1790563" y="3155678"/>
-                  </a:lnTo>
-                  <a:lnTo>
-                    <a:pt x="1718940" y="3169587"/>
-                  </a:lnTo>
-                  <a:lnTo>
-                    <a:pt x="1647318" y="3183107"/>
-                  </a:lnTo>
-                  <a:lnTo>
-                    <a:pt x="1575695" y="3196248"/>
-                  </a:lnTo>
-                  <a:lnTo>
-                    <a:pt x="1504073" y="3209022"/>
-                  </a:lnTo>
-                  <a:lnTo>
-                    <a:pt x="1432450" y="3221438"/>
-                  </a:lnTo>
-                  <a:lnTo>
-                    <a:pt x="1360827" y="3233506"/>
-                  </a:lnTo>
-                  <a:lnTo>
-                    <a:pt x="1289205" y="3245237"/>
-                  </a:lnTo>
-                  <a:lnTo>
-                    <a:pt x="1217582" y="3256639"/>
-                  </a:lnTo>
-                  <a:lnTo>
-                    <a:pt x="1145960" y="3267723"/>
-                  </a:lnTo>
-                  <a:lnTo>
-                    <a:pt x="1074337" y="3278496"/>
-                  </a:lnTo>
-                  <a:lnTo>
-                    <a:pt x="1002715" y="3288967"/>
-                  </a:lnTo>
-                  <a:lnTo>
-                    <a:pt x="931092" y="3299146"/>
-                  </a:lnTo>
-                  <a:lnTo>
-                    <a:pt x="859470" y="3309039"/>
-                  </a:lnTo>
-                  <a:lnTo>
-                    <a:pt x="787847" y="3318656"/>
-                  </a:lnTo>
-                  <a:lnTo>
-                    <a:pt x="716225" y="3328004"/>
-                  </a:lnTo>
-                  <a:lnTo>
-                    <a:pt x="644602" y="3337090"/>
-                  </a:lnTo>
-                  <a:lnTo>
-                    <a:pt x="572980" y="3345921"/>
-                  </a:lnTo>
-                  <a:lnTo>
-                    <a:pt x="501357" y="3354506"/>
-                  </a:lnTo>
-                  <a:lnTo>
-                    <a:pt x="429735" y="3362850"/>
-                  </a:lnTo>
-                  <a:lnTo>
-                    <a:pt x="358112" y="3370961"/>
-                  </a:lnTo>
-                  <a:lnTo>
-                    <a:pt x="286490" y="3378844"/>
-                  </a:lnTo>
-                  <a:lnTo>
-                    <a:pt x="214867" y="3386507"/>
-                  </a:lnTo>
-                  <a:lnTo>
-                    <a:pt x="143245" y="3393956"/>
-                  </a:lnTo>
-                  <a:lnTo>
-                    <a:pt x="71622" y="3401196"/>
-                  </a:lnTo>
-                  <a:lnTo>
-                    <a:pt x="0" y="3408233"/>
+                    <a:pt x="7090630" y="2883314"/>
+                  </a:lnTo>
+                  <a:lnTo>
+                    <a:pt x="7019007" y="2881593"/>
+                  </a:lnTo>
+                  <a:lnTo>
+                    <a:pt x="6947385" y="2879867"/>
+                  </a:lnTo>
+                  <a:lnTo>
+                    <a:pt x="6875762" y="2878138"/>
+                  </a:lnTo>
+                  <a:lnTo>
+                    <a:pt x="6804139" y="2876405"/>
+                  </a:lnTo>
+                  <a:lnTo>
+                    <a:pt x="6732517" y="2874668"/>
+                  </a:lnTo>
+                  <a:lnTo>
+                    <a:pt x="6660894" y="2872927"/>
+                  </a:lnTo>
+                  <a:lnTo>
+                    <a:pt x="6589272" y="2871182"/>
+                  </a:lnTo>
+                  <a:lnTo>
+                    <a:pt x="6517649" y="2869434"/>
+                  </a:lnTo>
+                  <a:lnTo>
+                    <a:pt x="6446027" y="2867681"/>
+                  </a:lnTo>
+                  <a:lnTo>
+                    <a:pt x="6374404" y="2865925"/>
+                  </a:lnTo>
+                  <a:lnTo>
+                    <a:pt x="6302782" y="2864164"/>
+                  </a:lnTo>
+                  <a:lnTo>
+                    <a:pt x="6231159" y="2862400"/>
+                  </a:lnTo>
+                  <a:lnTo>
+                    <a:pt x="6159537" y="2860632"/>
+                  </a:lnTo>
+                  <a:lnTo>
+                    <a:pt x="6087914" y="2858859"/>
+                  </a:lnTo>
+                  <a:lnTo>
+                    <a:pt x="6016292" y="2857083"/>
+                  </a:lnTo>
+                  <a:lnTo>
+                    <a:pt x="5944669" y="2855303"/>
+                  </a:lnTo>
+                  <a:lnTo>
+                    <a:pt x="5873047" y="2853519"/>
+                  </a:lnTo>
+                  <a:lnTo>
+                    <a:pt x="5801424" y="2851731"/>
+                  </a:lnTo>
+                  <a:lnTo>
+                    <a:pt x="5729802" y="2849938"/>
+                  </a:lnTo>
+                  <a:lnTo>
+                    <a:pt x="5658179" y="2848142"/>
+                  </a:lnTo>
+                  <a:lnTo>
+                    <a:pt x="5586557" y="2846342"/>
+                  </a:lnTo>
+                  <a:lnTo>
+                    <a:pt x="5514934" y="2844538"/>
+                  </a:lnTo>
+                  <a:lnTo>
+                    <a:pt x="5443311" y="2842730"/>
+                  </a:lnTo>
+                  <a:lnTo>
+                    <a:pt x="5371689" y="2840917"/>
+                  </a:lnTo>
+                  <a:lnTo>
+                    <a:pt x="5300066" y="2839101"/>
+                  </a:lnTo>
+                  <a:lnTo>
+                    <a:pt x="5228444" y="2837280"/>
+                  </a:lnTo>
+                  <a:lnTo>
+                    <a:pt x="5156821" y="2835456"/>
+                  </a:lnTo>
+                  <a:lnTo>
+                    <a:pt x="5085199" y="2833627"/>
+                  </a:lnTo>
+                  <a:lnTo>
+                    <a:pt x="5013576" y="2831795"/>
+                  </a:lnTo>
+                  <a:lnTo>
+                    <a:pt x="4941954" y="2829958"/>
+                  </a:lnTo>
+                  <a:lnTo>
+                    <a:pt x="4870331" y="2828117"/>
+                  </a:lnTo>
+                  <a:lnTo>
+                    <a:pt x="4798709" y="2826272"/>
+                  </a:lnTo>
+                  <a:lnTo>
+                    <a:pt x="4727086" y="2824423"/>
+                  </a:lnTo>
+                  <a:lnTo>
+                    <a:pt x="4655464" y="2822569"/>
+                  </a:lnTo>
+                  <a:lnTo>
+                    <a:pt x="4583841" y="2820712"/>
+                  </a:lnTo>
+                  <a:lnTo>
+                    <a:pt x="4512219" y="2818850"/>
+                  </a:lnTo>
+                  <a:lnTo>
+                    <a:pt x="4440596" y="2816985"/>
+                  </a:lnTo>
+                  <a:lnTo>
+                    <a:pt x="4368974" y="2815115"/>
+                  </a:lnTo>
+                  <a:lnTo>
+                    <a:pt x="4297351" y="2813241"/>
+                  </a:lnTo>
+                  <a:lnTo>
+                    <a:pt x="4225729" y="2811362"/>
+                  </a:lnTo>
+                  <a:lnTo>
+                    <a:pt x="4154106" y="2809480"/>
+                  </a:lnTo>
+                  <a:lnTo>
+                    <a:pt x="4082483" y="2807593"/>
+                  </a:lnTo>
+                  <a:lnTo>
+                    <a:pt x="4010861" y="2805702"/>
+                  </a:lnTo>
+                  <a:lnTo>
+                    <a:pt x="3939238" y="2803807"/>
+                  </a:lnTo>
+                  <a:lnTo>
+                    <a:pt x="3867616" y="2801908"/>
+                  </a:lnTo>
+                  <a:lnTo>
+                    <a:pt x="3795993" y="2800004"/>
+                  </a:lnTo>
+                  <a:lnTo>
+                    <a:pt x="3724371" y="2798096"/>
+                  </a:lnTo>
+                  <a:lnTo>
+                    <a:pt x="3652748" y="2796184"/>
+                  </a:lnTo>
+                  <a:lnTo>
+                    <a:pt x="3581126" y="2794267"/>
+                  </a:lnTo>
+                  <a:lnTo>
+                    <a:pt x="3509503" y="2792346"/>
+                  </a:lnTo>
+                  <a:lnTo>
+                    <a:pt x="3437881" y="2790421"/>
+                  </a:lnTo>
+                  <a:lnTo>
+                    <a:pt x="3366258" y="2788492"/>
+                  </a:lnTo>
+                  <a:lnTo>
+                    <a:pt x="3294636" y="2786558"/>
+                  </a:lnTo>
+                  <a:lnTo>
+                    <a:pt x="3223013" y="2784620"/>
+                  </a:lnTo>
+                  <a:lnTo>
+                    <a:pt x="3151391" y="2786771"/>
+                  </a:lnTo>
+                  <a:lnTo>
+                    <a:pt x="3079768" y="2812011"/>
+                  </a:lnTo>
+                  <a:lnTo>
+                    <a:pt x="3008146" y="2836515"/>
+                  </a:lnTo>
+                  <a:lnTo>
+                    <a:pt x="2936523" y="2860305"/>
+                  </a:lnTo>
+                  <a:lnTo>
+                    <a:pt x="2864901" y="2883401"/>
+                  </a:lnTo>
+                  <a:lnTo>
+                    <a:pt x="2793278" y="2905824"/>
+                  </a:lnTo>
+                  <a:lnTo>
+                    <a:pt x="2721655" y="2927593"/>
+                  </a:lnTo>
+                  <a:lnTo>
+                    <a:pt x="2650033" y="2948728"/>
+                  </a:lnTo>
+                  <a:lnTo>
+                    <a:pt x="2578410" y="2969247"/>
+                  </a:lnTo>
+                  <a:lnTo>
+                    <a:pt x="2506788" y="2989167"/>
+                  </a:lnTo>
+                  <a:lnTo>
+                    <a:pt x="2435165" y="3008507"/>
+                  </a:lnTo>
+                  <a:lnTo>
+                    <a:pt x="2363543" y="3027283"/>
+                  </a:lnTo>
+                  <a:lnTo>
+                    <a:pt x="2291920" y="3045512"/>
+                  </a:lnTo>
+                  <a:lnTo>
+                    <a:pt x="2220298" y="3063210"/>
+                  </a:lnTo>
+                  <a:lnTo>
+                    <a:pt x="2148675" y="3080391"/>
+                  </a:lnTo>
+                  <a:lnTo>
+                    <a:pt x="2077053" y="3097072"/>
+                  </a:lnTo>
+                  <a:lnTo>
+                    <a:pt x="2005430" y="3113267"/>
+                  </a:lnTo>
+                  <a:lnTo>
+                    <a:pt x="1933808" y="3128989"/>
+                  </a:lnTo>
+                  <a:lnTo>
+                    <a:pt x="1862185" y="3144253"/>
+                  </a:lnTo>
+                  <a:lnTo>
+                    <a:pt x="1790563" y="3159073"/>
+                  </a:lnTo>
+                  <a:lnTo>
+                    <a:pt x="1718940" y="3173460"/>
+                  </a:lnTo>
+                  <a:lnTo>
+                    <a:pt x="1647318" y="3187428"/>
+                  </a:lnTo>
+                  <a:lnTo>
+                    <a:pt x="1575695" y="3200989"/>
+                  </a:lnTo>
+                  <a:lnTo>
+                    <a:pt x="1504073" y="3214154"/>
+                  </a:lnTo>
+                  <a:lnTo>
+                    <a:pt x="1432450" y="3226936"/>
+                  </a:lnTo>
+                  <a:lnTo>
+                    <a:pt x="1360827" y="3239345"/>
+                  </a:lnTo>
+                  <a:lnTo>
+                    <a:pt x="1289205" y="3251392"/>
+                  </a:lnTo>
+                  <a:lnTo>
+                    <a:pt x="1217582" y="3263089"/>
+                  </a:lnTo>
+                  <a:lnTo>
+                    <a:pt x="1145960" y="3274444"/>
+                  </a:lnTo>
+                  <a:lnTo>
+                    <a:pt x="1074337" y="3285468"/>
+                  </a:lnTo>
+                  <a:lnTo>
+                    <a:pt x="1002715" y="3296171"/>
+                  </a:lnTo>
+                  <a:lnTo>
+                    <a:pt x="931092" y="3306562"/>
+                  </a:lnTo>
+                  <a:lnTo>
+                    <a:pt x="859470" y="3316650"/>
+                  </a:lnTo>
+                  <a:lnTo>
+                    <a:pt x="787847" y="3326444"/>
+                  </a:lnTo>
+                  <a:lnTo>
+                    <a:pt x="716225" y="3335953"/>
+                  </a:lnTo>
+                  <a:lnTo>
+                    <a:pt x="644602" y="3345184"/>
+                  </a:lnTo>
+                  <a:lnTo>
+                    <a:pt x="572980" y="3354146"/>
+                  </a:lnTo>
+                  <a:lnTo>
+                    <a:pt x="501357" y="3362847"/>
+                  </a:lnTo>
+                  <a:lnTo>
+                    <a:pt x="429735" y="3371295"/>
+                  </a:lnTo>
+                  <a:lnTo>
+                    <a:pt x="358112" y="3379496"/>
+                  </a:lnTo>
+                  <a:lnTo>
+                    <a:pt x="286490" y="3387458"/>
+                  </a:lnTo>
+                  <a:lnTo>
+                    <a:pt x="214867" y="3395188"/>
+                  </a:lnTo>
+                  <a:lnTo>
+                    <a:pt x="143245" y="3402692"/>
+                  </a:lnTo>
+                  <a:lnTo>
+                    <a:pt x="71622" y="3409978"/>
+                  </a:lnTo>
+                  <a:lnTo>
+                    <a:pt x="0" y="3417052"/>
                   </a:lnTo>
                   <a:close/>
                 </a:path>
@@ -3585,302 +3576,293 @@
           <p:spPr>
             <a:xfrm>
               <a:off x="1172049" y="1896563"/>
-              <a:ext cx="6823126" cy="2781015"/>
+              <a:ext cx="6636246" cy="2782678"/>
             </a:xfrm>
             <a:custGeom>
               <a:avLst/>
               <a:pathLst>
-                <a:path w="6823126" h="2781015">
+                <a:path w="6636246" h="2782678">
                   <a:moveTo>
-                    <a:pt x="0" y="2651791"/>
+                    <a:pt x="0" y="2692770"/>
                   </a:moveTo>
                   <a:lnTo>
-                    <a:pt x="71622" y="2654930"/>
-                  </a:lnTo>
-                  <a:lnTo>
-                    <a:pt x="143245" y="2658060"/>
-                  </a:lnTo>
-                  <a:lnTo>
-                    <a:pt x="214867" y="2661180"/>
-                  </a:lnTo>
-                  <a:lnTo>
-                    <a:pt x="286490" y="2664290"/>
-                  </a:lnTo>
-                  <a:lnTo>
-                    <a:pt x="358112" y="2667391"/>
-                  </a:lnTo>
-                  <a:lnTo>
-                    <a:pt x="429735" y="2670482"/>
-                  </a:lnTo>
-                  <a:lnTo>
-                    <a:pt x="501357" y="2673563"/>
-                  </a:lnTo>
-                  <a:lnTo>
-                    <a:pt x="572980" y="2676634"/>
-                  </a:lnTo>
-                  <a:lnTo>
-                    <a:pt x="644602" y="2679696"/>
-                  </a:lnTo>
-                  <a:lnTo>
-                    <a:pt x="716225" y="2682748"/>
-                  </a:lnTo>
-                  <a:lnTo>
-                    <a:pt x="787847" y="2685790"/>
-                  </a:lnTo>
-                  <a:lnTo>
-                    <a:pt x="859470" y="2688823"/>
-                  </a:lnTo>
-                  <a:lnTo>
-                    <a:pt x="931092" y="2691847"/>
-                  </a:lnTo>
-                  <a:lnTo>
-                    <a:pt x="1002715" y="2694861"/>
-                  </a:lnTo>
-                  <a:lnTo>
-                    <a:pt x="1074337" y="2697865"/>
-                  </a:lnTo>
-                  <a:lnTo>
-                    <a:pt x="1145960" y="2700860"/>
-                  </a:lnTo>
-                  <a:lnTo>
-                    <a:pt x="1217582" y="2703846"/>
-                  </a:lnTo>
-                  <a:lnTo>
-                    <a:pt x="1289205" y="2706823"/>
-                  </a:lnTo>
-                  <a:lnTo>
-                    <a:pt x="1360827" y="2709790"/>
-                  </a:lnTo>
-                  <a:lnTo>
-                    <a:pt x="1432450" y="2712747"/>
-                  </a:lnTo>
-                  <a:lnTo>
-                    <a:pt x="1504073" y="2715696"/>
-                  </a:lnTo>
-                  <a:lnTo>
-                    <a:pt x="1575695" y="2718635"/>
-                  </a:lnTo>
-                  <a:lnTo>
-                    <a:pt x="1647318" y="2721565"/>
-                  </a:lnTo>
-                  <a:lnTo>
-                    <a:pt x="1718940" y="2724486"/>
-                  </a:lnTo>
-                  <a:lnTo>
-                    <a:pt x="1790563" y="2727397"/>
-                  </a:lnTo>
-                  <a:lnTo>
-                    <a:pt x="1862185" y="2730300"/>
-                  </a:lnTo>
-                  <a:lnTo>
-                    <a:pt x="1933808" y="2733193"/>
-                  </a:lnTo>
-                  <a:lnTo>
-                    <a:pt x="2005430" y="2736077"/>
-                  </a:lnTo>
-                  <a:lnTo>
-                    <a:pt x="2077053" y="2738953"/>
-                  </a:lnTo>
-                  <a:lnTo>
-                    <a:pt x="2148675" y="2741819"/>
-                  </a:lnTo>
-                  <a:lnTo>
-                    <a:pt x="2220298" y="2744676"/>
-                  </a:lnTo>
-                  <a:lnTo>
-                    <a:pt x="2291920" y="2747524"/>
-                  </a:lnTo>
-                  <a:lnTo>
-                    <a:pt x="2363543" y="2750364"/>
-                  </a:lnTo>
-                  <a:lnTo>
-                    <a:pt x="2435165" y="2753194"/>
-                  </a:lnTo>
-                  <a:lnTo>
-                    <a:pt x="2506788" y="2756016"/>
-                  </a:lnTo>
-                  <a:lnTo>
-                    <a:pt x="2578410" y="2758828"/>
-                  </a:lnTo>
-                  <a:lnTo>
-                    <a:pt x="2650033" y="2761632"/>
-                  </a:lnTo>
-                  <a:lnTo>
-                    <a:pt x="2721655" y="2764427"/>
-                  </a:lnTo>
-                  <a:lnTo>
-                    <a:pt x="2793278" y="2767214"/>
-                  </a:lnTo>
-                  <a:lnTo>
-                    <a:pt x="2864901" y="2769991"/>
-                  </a:lnTo>
-                  <a:lnTo>
-                    <a:pt x="2936523" y="2772760"/>
-                  </a:lnTo>
-                  <a:lnTo>
-                    <a:pt x="3008146" y="2775520"/>
-                  </a:lnTo>
-                  <a:lnTo>
-                    <a:pt x="3079768" y="2778272"/>
-                  </a:lnTo>
-                  <a:lnTo>
-                    <a:pt x="3151391" y="2781015"/>
-                  </a:lnTo>
-                  <a:lnTo>
-                    <a:pt x="3223013" y="2775862"/>
-                  </a:lnTo>
-                  <a:lnTo>
-                    <a:pt x="3294636" y="2750616"/>
-                  </a:lnTo>
-                  <a:lnTo>
-                    <a:pt x="3366258" y="2724644"/>
-                  </a:lnTo>
-                  <a:lnTo>
-                    <a:pt x="3437881" y="2697923"/>
-                  </a:lnTo>
-                  <a:lnTo>
-                    <a:pt x="3509503" y="2670433"/>
-                  </a:lnTo>
-                  <a:lnTo>
-                    <a:pt x="3581126" y="2642152"/>
-                  </a:lnTo>
-                  <a:lnTo>
-                    <a:pt x="3652748" y="2613056"/>
-                  </a:lnTo>
-                  <a:lnTo>
-                    <a:pt x="3724371" y="2583123"/>
-                  </a:lnTo>
-                  <a:lnTo>
-                    <a:pt x="3795993" y="2552327"/>
-                  </a:lnTo>
-                  <a:lnTo>
-                    <a:pt x="3867616" y="2520645"/>
-                  </a:lnTo>
-                  <a:lnTo>
-                    <a:pt x="3939238" y="2488051"/>
-                  </a:lnTo>
-                  <a:lnTo>
-                    <a:pt x="4010861" y="2454518"/>
-                  </a:lnTo>
-                  <a:lnTo>
-                    <a:pt x="4082483" y="2420020"/>
-                  </a:lnTo>
-                  <a:lnTo>
-                    <a:pt x="4154106" y="2384528"/>
-                  </a:lnTo>
-                  <a:lnTo>
-                    <a:pt x="4225729" y="2348014"/>
-                  </a:lnTo>
-                  <a:lnTo>
-                    <a:pt x="4297351" y="2310449"/>
-                  </a:lnTo>
-                  <a:lnTo>
-                    <a:pt x="4368974" y="2271802"/>
-                  </a:lnTo>
-                  <a:lnTo>
-                    <a:pt x="4440596" y="2232043"/>
-                  </a:lnTo>
-                  <a:lnTo>
-                    <a:pt x="4512219" y="2191139"/>
-                  </a:lnTo>
-                  <a:lnTo>
-                    <a:pt x="4583841" y="2149057"/>
-                  </a:lnTo>
-                  <a:lnTo>
-                    <a:pt x="4655464" y="2105763"/>
-                  </a:lnTo>
-                  <a:lnTo>
-                    <a:pt x="4727086" y="2061223"/>
-                  </a:lnTo>
-                  <a:lnTo>
-                    <a:pt x="4798709" y="2015400"/>
-                  </a:lnTo>
-                  <a:lnTo>
-                    <a:pt x="4870331" y="1968258"/>
-                  </a:lnTo>
-                  <a:lnTo>
-                    <a:pt x="4941954" y="1919758"/>
-                  </a:lnTo>
-                  <a:lnTo>
-                    <a:pt x="5013576" y="1869862"/>
-                  </a:lnTo>
-                  <a:lnTo>
-                    <a:pt x="5085199" y="1818529"/>
-                  </a:lnTo>
-                  <a:lnTo>
-                    <a:pt x="5156821" y="1765718"/>
-                  </a:lnTo>
-                  <a:lnTo>
-                    <a:pt x="5228444" y="1711387"/>
-                  </a:lnTo>
-                  <a:lnTo>
-                    <a:pt x="5300066" y="1655491"/>
-                  </a:lnTo>
-                  <a:lnTo>
-                    <a:pt x="5371689" y="1597986"/>
-                  </a:lnTo>
-                  <a:lnTo>
-                    <a:pt x="5443311" y="1538825"/>
-                  </a:lnTo>
-                  <a:lnTo>
-                    <a:pt x="5514934" y="1477960"/>
-                  </a:lnTo>
-                  <a:lnTo>
-                    <a:pt x="5586557" y="1415343"/>
-                  </a:lnTo>
-                  <a:lnTo>
-                    <a:pt x="5658179" y="1350923"/>
-                  </a:lnTo>
-                  <a:lnTo>
-                    <a:pt x="5729802" y="1284648"/>
-                  </a:lnTo>
-                  <a:lnTo>
-                    <a:pt x="5801424" y="1216465"/>
-                  </a:lnTo>
-                  <a:lnTo>
-                    <a:pt x="5873047" y="1146318"/>
-                  </a:lnTo>
-                  <a:lnTo>
-                    <a:pt x="5944669" y="1074152"/>
-                  </a:lnTo>
-                  <a:lnTo>
-                    <a:pt x="6016292" y="999908"/>
-                  </a:lnTo>
-                  <a:lnTo>
-                    <a:pt x="6087914" y="923526"/>
-                  </a:lnTo>
-                  <a:lnTo>
-                    <a:pt x="6159537" y="844945"/>
-                  </a:lnTo>
-                  <a:lnTo>
-                    <a:pt x="6231159" y="764101"/>
-                  </a:lnTo>
-                  <a:lnTo>
-                    <a:pt x="6302782" y="680929"/>
-                  </a:lnTo>
-                  <a:lnTo>
-                    <a:pt x="6374404" y="595363"/>
-                  </a:lnTo>
-                  <a:lnTo>
-                    <a:pt x="6446027" y="507333"/>
-                  </a:lnTo>
-                  <a:lnTo>
-                    <a:pt x="6517649" y="416768"/>
-                  </a:lnTo>
-                  <a:lnTo>
-                    <a:pt x="6589272" y="323595"/>
-                  </a:lnTo>
-                  <a:lnTo>
-                    <a:pt x="6660894" y="227739"/>
-                  </a:lnTo>
-                  <a:lnTo>
-                    <a:pt x="6732517" y="129124"/>
-                  </a:lnTo>
-                  <a:lnTo>
-                    <a:pt x="6804139" y="27669"/>
-                  </a:lnTo>
-                  <a:lnTo>
-                    <a:pt x="6823126" y="0"/>
+                    <a:pt x="71622" y="2694914"/>
+                  </a:lnTo>
+                  <a:lnTo>
+                    <a:pt x="143245" y="2697052"/>
+                  </a:lnTo>
+                  <a:lnTo>
+                    <a:pt x="214867" y="2699185"/>
+                  </a:lnTo>
+                  <a:lnTo>
+                    <a:pt x="286490" y="2701314"/>
+                  </a:lnTo>
+                  <a:lnTo>
+                    <a:pt x="358112" y="2703438"/>
+                  </a:lnTo>
+                  <a:lnTo>
+                    <a:pt x="429735" y="2705557"/>
+                  </a:lnTo>
+                  <a:lnTo>
+                    <a:pt x="501357" y="2707672"/>
+                  </a:lnTo>
+                  <a:lnTo>
+                    <a:pt x="572980" y="2709782"/>
+                  </a:lnTo>
+                  <a:lnTo>
+                    <a:pt x="644602" y="2711887"/>
+                  </a:lnTo>
+                  <a:lnTo>
+                    <a:pt x="716225" y="2713987"/>
+                  </a:lnTo>
+                  <a:lnTo>
+                    <a:pt x="787847" y="2716083"/>
+                  </a:lnTo>
+                  <a:lnTo>
+                    <a:pt x="859470" y="2718174"/>
+                  </a:lnTo>
+                  <a:lnTo>
+                    <a:pt x="931092" y="2720260"/>
+                  </a:lnTo>
+                  <a:lnTo>
+                    <a:pt x="1002715" y="2722342"/>
+                  </a:lnTo>
+                  <a:lnTo>
+                    <a:pt x="1074337" y="2724419"/>
+                  </a:lnTo>
+                  <a:lnTo>
+                    <a:pt x="1145960" y="2726492"/>
+                  </a:lnTo>
+                  <a:lnTo>
+                    <a:pt x="1217582" y="2728559"/>
+                  </a:lnTo>
+                  <a:lnTo>
+                    <a:pt x="1289205" y="2730623"/>
+                  </a:lnTo>
+                  <a:lnTo>
+                    <a:pt x="1360827" y="2732681"/>
+                  </a:lnTo>
+                  <a:lnTo>
+                    <a:pt x="1432450" y="2734735"/>
+                  </a:lnTo>
+                  <a:lnTo>
+                    <a:pt x="1504073" y="2736784"/>
+                  </a:lnTo>
+                  <a:lnTo>
+                    <a:pt x="1575695" y="2738829"/>
+                  </a:lnTo>
+                  <a:lnTo>
+                    <a:pt x="1647318" y="2740870"/>
+                  </a:lnTo>
+                  <a:lnTo>
+                    <a:pt x="1718940" y="2742905"/>
+                  </a:lnTo>
+                  <a:lnTo>
+                    <a:pt x="1790563" y="2744936"/>
+                  </a:lnTo>
+                  <a:lnTo>
+                    <a:pt x="1862185" y="2746963"/>
+                  </a:lnTo>
+                  <a:lnTo>
+                    <a:pt x="1933808" y="2748985"/>
+                  </a:lnTo>
+                  <a:lnTo>
+                    <a:pt x="2005430" y="2751003"/>
+                  </a:lnTo>
+                  <a:lnTo>
+                    <a:pt x="2077053" y="2753016"/>
+                  </a:lnTo>
+                  <a:lnTo>
+                    <a:pt x="2148675" y="2755024"/>
+                  </a:lnTo>
+                  <a:lnTo>
+                    <a:pt x="2220298" y="2757028"/>
+                  </a:lnTo>
+                  <a:lnTo>
+                    <a:pt x="2291920" y="2759028"/>
+                  </a:lnTo>
+                  <a:lnTo>
+                    <a:pt x="2363543" y="2761023"/>
+                  </a:lnTo>
+                  <a:lnTo>
+                    <a:pt x="2435165" y="2763014"/>
+                  </a:lnTo>
+                  <a:lnTo>
+                    <a:pt x="2506788" y="2765000"/>
+                  </a:lnTo>
+                  <a:lnTo>
+                    <a:pt x="2578410" y="2766982"/>
+                  </a:lnTo>
+                  <a:lnTo>
+                    <a:pt x="2650033" y="2768959"/>
+                  </a:lnTo>
+                  <a:lnTo>
+                    <a:pt x="2721655" y="2770932"/>
+                  </a:lnTo>
+                  <a:lnTo>
+                    <a:pt x="2793278" y="2772901"/>
+                  </a:lnTo>
+                  <a:lnTo>
+                    <a:pt x="2864901" y="2774865"/>
+                  </a:lnTo>
+                  <a:lnTo>
+                    <a:pt x="2936523" y="2776825"/>
+                  </a:lnTo>
+                  <a:lnTo>
+                    <a:pt x="3008146" y="2778780"/>
+                  </a:lnTo>
+                  <a:lnTo>
+                    <a:pt x="3079768" y="2780731"/>
+                  </a:lnTo>
+                  <a:lnTo>
+                    <a:pt x="3151391" y="2782678"/>
+                  </a:lnTo>
+                  <a:lnTo>
+                    <a:pt x="3223013" y="2760774"/>
+                  </a:lnTo>
+                  <a:lnTo>
+                    <a:pt x="3294636" y="2733996"/>
+                  </a:lnTo>
+                  <a:lnTo>
+                    <a:pt x="3366258" y="2706414"/>
+                  </a:lnTo>
+                  <a:lnTo>
+                    <a:pt x="3437881" y="2678004"/>
+                  </a:lnTo>
+                  <a:lnTo>
+                    <a:pt x="3509503" y="2648741"/>
+                  </a:lnTo>
+                  <a:lnTo>
+                    <a:pt x="3581126" y="2618599"/>
+                  </a:lnTo>
+                  <a:lnTo>
+                    <a:pt x="3652748" y="2587552"/>
+                  </a:lnTo>
+                  <a:lnTo>
+                    <a:pt x="3724371" y="2555573"/>
+                  </a:lnTo>
+                  <a:lnTo>
+                    <a:pt x="3795993" y="2522634"/>
+                  </a:lnTo>
+                  <a:lnTo>
+                    <a:pt x="3867616" y="2488706"/>
+                  </a:lnTo>
+                  <a:lnTo>
+                    <a:pt x="3939238" y="2453759"/>
+                  </a:lnTo>
+                  <a:lnTo>
+                    <a:pt x="4010861" y="2417763"/>
+                  </a:lnTo>
+                  <a:lnTo>
+                    <a:pt x="4082483" y="2380686"/>
+                  </a:lnTo>
+                  <a:lnTo>
+                    <a:pt x="4154106" y="2342496"/>
+                  </a:lnTo>
+                  <a:lnTo>
+                    <a:pt x="4225729" y="2303160"/>
+                  </a:lnTo>
+                  <a:lnTo>
+                    <a:pt x="4297351" y="2262642"/>
+                  </a:lnTo>
+                  <a:lnTo>
+                    <a:pt x="4368974" y="2220908"/>
+                  </a:lnTo>
+                  <a:lnTo>
+                    <a:pt x="4440596" y="2177920"/>
+                  </a:lnTo>
+                  <a:lnTo>
+                    <a:pt x="4512219" y="2133642"/>
+                  </a:lnTo>
+                  <a:lnTo>
+                    <a:pt x="4583841" y="2088035"/>
+                  </a:lnTo>
+                  <a:lnTo>
+                    <a:pt x="4655464" y="2041058"/>
+                  </a:lnTo>
+                  <a:lnTo>
+                    <a:pt x="4727086" y="1992671"/>
+                  </a:lnTo>
+                  <a:lnTo>
+                    <a:pt x="4798709" y="1942831"/>
+                  </a:lnTo>
+                  <a:lnTo>
+                    <a:pt x="4870331" y="1891495"/>
+                  </a:lnTo>
+                  <a:lnTo>
+                    <a:pt x="4941954" y="1838617"/>
+                  </a:lnTo>
+                  <a:lnTo>
+                    <a:pt x="5013576" y="1784151"/>
+                  </a:lnTo>
+                  <a:lnTo>
+                    <a:pt x="5085199" y="1728051"/>
+                  </a:lnTo>
+                  <a:lnTo>
+                    <a:pt x="5156821" y="1670266"/>
+                  </a:lnTo>
+                  <a:lnTo>
+                    <a:pt x="5228444" y="1610746"/>
+                  </a:lnTo>
+                  <a:lnTo>
+                    <a:pt x="5300066" y="1549438"/>
+                  </a:lnTo>
+                  <a:lnTo>
+                    <a:pt x="5371689" y="1486290"/>
+                  </a:lnTo>
+                  <a:lnTo>
+                    <a:pt x="5443311" y="1421247"/>
+                  </a:lnTo>
+                  <a:lnTo>
+                    <a:pt x="5514934" y="1354250"/>
+                  </a:lnTo>
+                  <a:lnTo>
+                    <a:pt x="5586557" y="1285241"/>
+                  </a:lnTo>
+                  <a:lnTo>
+                    <a:pt x="5658179" y="1214161"/>
+                  </a:lnTo>
+                  <a:lnTo>
+                    <a:pt x="5729802" y="1140947"/>
+                  </a:lnTo>
+                  <a:lnTo>
+                    <a:pt x="5801424" y="1065534"/>
+                  </a:lnTo>
+                  <a:lnTo>
+                    <a:pt x="5873047" y="987857"/>
+                  </a:lnTo>
+                  <a:lnTo>
+                    <a:pt x="5944669" y="907848"/>
+                  </a:lnTo>
+                  <a:lnTo>
+                    <a:pt x="6016292" y="825436"/>
+                  </a:lnTo>
+                  <a:lnTo>
+                    <a:pt x="6087914" y="740551"/>
+                  </a:lnTo>
+                  <a:lnTo>
+                    <a:pt x="6159537" y="653116"/>
+                  </a:lnTo>
+                  <a:lnTo>
+                    <a:pt x="6231159" y="563057"/>
+                  </a:lnTo>
+                  <a:lnTo>
+                    <a:pt x="6302782" y="470293"/>
+                  </a:lnTo>
+                  <a:lnTo>
+                    <a:pt x="6374404" y="374744"/>
+                  </a:lnTo>
+                  <a:lnTo>
+                    <a:pt x="6446027" y="276327"/>
+                  </a:lnTo>
+                  <a:lnTo>
+                    <a:pt x="6517649" y="174954"/>
+                  </a:lnTo>
+                  <a:lnTo>
+                    <a:pt x="6589272" y="70538"/>
+                  </a:lnTo>
+                  <a:lnTo>
+                    <a:pt x="6636246" y="0"/>
                   </a:lnTo>
                 </a:path>
               </a:pathLst>
@@ -3900,312 +3882,312 @@
           </p:nvSpPr>
           <p:spPr>
             <a:xfrm>
-              <a:off x="1172049" y="4680312"/>
-              <a:ext cx="7090630" cy="624484"/>
+              <a:off x="1172049" y="4681184"/>
+              <a:ext cx="7090630" cy="632431"/>
             </a:xfrm>
             <a:custGeom>
               <a:avLst/>
               <a:pathLst>
-                <a:path w="7090630" h="624484">
+                <a:path w="7090630" h="632431">
                   <a:moveTo>
-                    <a:pt x="7090630" y="135591"/>
+                    <a:pt x="7090630" y="98693"/>
                   </a:moveTo>
                   <a:lnTo>
-                    <a:pt x="7019007" y="133284"/>
-                  </a:lnTo>
-                  <a:lnTo>
-                    <a:pt x="6947385" y="130969"/>
-                  </a:lnTo>
-                  <a:lnTo>
-                    <a:pt x="6875762" y="128647"/>
-                  </a:lnTo>
-                  <a:lnTo>
-                    <a:pt x="6804139" y="126317"/>
-                  </a:lnTo>
-                  <a:lnTo>
-                    <a:pt x="6732517" y="123980"/>
-                  </a:lnTo>
-                  <a:lnTo>
-                    <a:pt x="6660894" y="121636"/>
-                  </a:lnTo>
-                  <a:lnTo>
-                    <a:pt x="6589272" y="119285"/>
-                  </a:lnTo>
-                  <a:lnTo>
-                    <a:pt x="6517649" y="116926"/>
-                  </a:lnTo>
-                  <a:lnTo>
-                    <a:pt x="6446027" y="114560"/>
-                  </a:lnTo>
-                  <a:lnTo>
-                    <a:pt x="6374404" y="112186"/>
-                  </a:lnTo>
-                  <a:lnTo>
-                    <a:pt x="6302782" y="109804"/>
-                  </a:lnTo>
-                  <a:lnTo>
-                    <a:pt x="6231159" y="107416"/>
-                  </a:lnTo>
-                  <a:lnTo>
-                    <a:pt x="6159537" y="105019"/>
-                  </a:lnTo>
-                  <a:lnTo>
-                    <a:pt x="6087914" y="102616"/>
-                  </a:lnTo>
-                  <a:lnTo>
-                    <a:pt x="6016292" y="100204"/>
-                  </a:lnTo>
-                  <a:lnTo>
-                    <a:pt x="5944669" y="97785"/>
-                  </a:lnTo>
-                  <a:lnTo>
-                    <a:pt x="5873047" y="95359"/>
-                  </a:lnTo>
-                  <a:lnTo>
-                    <a:pt x="5801424" y="92925"/>
-                  </a:lnTo>
-                  <a:lnTo>
-                    <a:pt x="5729802" y="90483"/>
-                  </a:lnTo>
-                  <a:lnTo>
-                    <a:pt x="5658179" y="88033"/>
-                  </a:lnTo>
-                  <a:lnTo>
-                    <a:pt x="5586557" y="85576"/>
-                  </a:lnTo>
-                  <a:lnTo>
-                    <a:pt x="5514934" y="83111"/>
-                  </a:lnTo>
-                  <a:lnTo>
-                    <a:pt x="5443311" y="80638"/>
-                  </a:lnTo>
-                  <a:lnTo>
-                    <a:pt x="5371689" y="78158"/>
-                  </a:lnTo>
-                  <a:lnTo>
-                    <a:pt x="5300066" y="75669"/>
-                  </a:lnTo>
-                  <a:lnTo>
-                    <a:pt x="5228444" y="73173"/>
-                  </a:lnTo>
-                  <a:lnTo>
-                    <a:pt x="5156821" y="70669"/>
-                  </a:lnTo>
-                  <a:lnTo>
-                    <a:pt x="5085199" y="68157"/>
-                  </a:lnTo>
-                  <a:lnTo>
-                    <a:pt x="5013576" y="65638"/>
-                  </a:lnTo>
-                  <a:lnTo>
-                    <a:pt x="4941954" y="63110"/>
-                  </a:lnTo>
-                  <a:lnTo>
-                    <a:pt x="4870331" y="60574"/>
-                  </a:lnTo>
-                  <a:lnTo>
-                    <a:pt x="4798709" y="58030"/>
-                  </a:lnTo>
-                  <a:lnTo>
-                    <a:pt x="4727086" y="55479"/>
-                  </a:lnTo>
-                  <a:lnTo>
-                    <a:pt x="4655464" y="52919"/>
-                  </a:lnTo>
-                  <a:lnTo>
-                    <a:pt x="4583841" y="50351"/>
-                  </a:lnTo>
-                  <a:lnTo>
-                    <a:pt x="4512219" y="47776"/>
-                  </a:lnTo>
-                  <a:lnTo>
-                    <a:pt x="4440596" y="45192"/>
-                  </a:lnTo>
-                  <a:lnTo>
-                    <a:pt x="4368974" y="42600"/>
-                  </a:lnTo>
-                  <a:lnTo>
-                    <a:pt x="4297351" y="39999"/>
-                  </a:lnTo>
-                  <a:lnTo>
-                    <a:pt x="4225729" y="37391"/>
-                  </a:lnTo>
-                  <a:lnTo>
-                    <a:pt x="4154106" y="34774"/>
-                  </a:lnTo>
-                  <a:lnTo>
-                    <a:pt x="4082483" y="32149"/>
-                  </a:lnTo>
-                  <a:lnTo>
-                    <a:pt x="4010861" y="29516"/>
-                  </a:lnTo>
-                  <a:lnTo>
-                    <a:pt x="3939238" y="26875"/>
-                  </a:lnTo>
-                  <a:lnTo>
-                    <a:pt x="3867616" y="24225"/>
-                  </a:lnTo>
-                  <a:lnTo>
-                    <a:pt x="3795993" y="21567"/>
-                  </a:lnTo>
-                  <a:lnTo>
-                    <a:pt x="3724371" y="18901"/>
-                  </a:lnTo>
-                  <a:lnTo>
-                    <a:pt x="3652748" y="16226"/>
-                  </a:lnTo>
-                  <a:lnTo>
-                    <a:pt x="3581126" y="13543"/>
-                  </a:lnTo>
-                  <a:lnTo>
-                    <a:pt x="3509503" y="10851"/>
-                  </a:lnTo>
-                  <a:lnTo>
-                    <a:pt x="3437881" y="8151"/>
-                  </a:lnTo>
-                  <a:lnTo>
-                    <a:pt x="3366258" y="5442"/>
-                  </a:lnTo>
-                  <a:lnTo>
-                    <a:pt x="3294636" y="2725"/>
+                    <a:pt x="7019007" y="96972"/>
+                  </a:lnTo>
+                  <a:lnTo>
+                    <a:pt x="6947385" y="95246"/>
+                  </a:lnTo>
+                  <a:lnTo>
+                    <a:pt x="6875762" y="93517"/>
+                  </a:lnTo>
+                  <a:lnTo>
+                    <a:pt x="6804139" y="91784"/>
+                  </a:lnTo>
+                  <a:lnTo>
+                    <a:pt x="6732517" y="90047"/>
+                  </a:lnTo>
+                  <a:lnTo>
+                    <a:pt x="6660894" y="88306"/>
+                  </a:lnTo>
+                  <a:lnTo>
+                    <a:pt x="6589272" y="86562"/>
+                  </a:lnTo>
+                  <a:lnTo>
+                    <a:pt x="6517649" y="84813"/>
+                  </a:lnTo>
+                  <a:lnTo>
+                    <a:pt x="6446027" y="83060"/>
+                  </a:lnTo>
+                  <a:lnTo>
+                    <a:pt x="6374404" y="81304"/>
+                  </a:lnTo>
+                  <a:lnTo>
+                    <a:pt x="6302782" y="79543"/>
+                  </a:lnTo>
+                  <a:lnTo>
+                    <a:pt x="6231159" y="77779"/>
+                  </a:lnTo>
+                  <a:lnTo>
+                    <a:pt x="6159537" y="76011"/>
+                  </a:lnTo>
+                  <a:lnTo>
+                    <a:pt x="6087914" y="74239"/>
+                  </a:lnTo>
+                  <a:lnTo>
+                    <a:pt x="6016292" y="72462"/>
+                  </a:lnTo>
+                  <a:lnTo>
+                    <a:pt x="5944669" y="70682"/>
+                  </a:lnTo>
+                  <a:lnTo>
+                    <a:pt x="5873047" y="68898"/>
+                  </a:lnTo>
+                  <a:lnTo>
+                    <a:pt x="5801424" y="67110"/>
+                  </a:lnTo>
+                  <a:lnTo>
+                    <a:pt x="5729802" y="65318"/>
+                  </a:lnTo>
+                  <a:lnTo>
+                    <a:pt x="5658179" y="63521"/>
+                  </a:lnTo>
+                  <a:lnTo>
+                    <a:pt x="5586557" y="61721"/>
+                  </a:lnTo>
+                  <a:lnTo>
+                    <a:pt x="5514934" y="59917"/>
+                  </a:lnTo>
+                  <a:lnTo>
+                    <a:pt x="5443311" y="58109"/>
+                  </a:lnTo>
+                  <a:lnTo>
+                    <a:pt x="5371689" y="56296"/>
+                  </a:lnTo>
+                  <a:lnTo>
+                    <a:pt x="5300066" y="54480"/>
+                  </a:lnTo>
+                  <a:lnTo>
+                    <a:pt x="5228444" y="52659"/>
+                  </a:lnTo>
+                  <a:lnTo>
+                    <a:pt x="5156821" y="50835"/>
+                  </a:lnTo>
+                  <a:lnTo>
+                    <a:pt x="5085199" y="49006"/>
+                  </a:lnTo>
+                  <a:lnTo>
+                    <a:pt x="5013576" y="47174"/>
+                  </a:lnTo>
+                  <a:lnTo>
+                    <a:pt x="4941954" y="45337"/>
+                  </a:lnTo>
+                  <a:lnTo>
+                    <a:pt x="4870331" y="43496"/>
+                  </a:lnTo>
+                  <a:lnTo>
+                    <a:pt x="4798709" y="41651"/>
+                  </a:lnTo>
+                  <a:lnTo>
+                    <a:pt x="4727086" y="39802"/>
+                  </a:lnTo>
+                  <a:lnTo>
+                    <a:pt x="4655464" y="37949"/>
+                  </a:lnTo>
+                  <a:lnTo>
+                    <a:pt x="4583841" y="36091"/>
+                  </a:lnTo>
+                  <a:lnTo>
+                    <a:pt x="4512219" y="34230"/>
+                  </a:lnTo>
+                  <a:lnTo>
+                    <a:pt x="4440596" y="32364"/>
+                  </a:lnTo>
+                  <a:lnTo>
+                    <a:pt x="4368974" y="30494"/>
+                  </a:lnTo>
+                  <a:lnTo>
+                    <a:pt x="4297351" y="28620"/>
+                  </a:lnTo>
+                  <a:lnTo>
+                    <a:pt x="4225729" y="26741"/>
+                  </a:lnTo>
+                  <a:lnTo>
+                    <a:pt x="4154106" y="24859"/>
+                  </a:lnTo>
+                  <a:lnTo>
+                    <a:pt x="4082483" y="22972"/>
+                  </a:lnTo>
+                  <a:lnTo>
+                    <a:pt x="4010861" y="21081"/>
+                  </a:lnTo>
+                  <a:lnTo>
+                    <a:pt x="3939238" y="19186"/>
+                  </a:lnTo>
+                  <a:lnTo>
+                    <a:pt x="3867616" y="17287"/>
+                  </a:lnTo>
+                  <a:lnTo>
+                    <a:pt x="3795993" y="15383"/>
+                  </a:lnTo>
+                  <a:lnTo>
+                    <a:pt x="3724371" y="13475"/>
+                  </a:lnTo>
+                  <a:lnTo>
+                    <a:pt x="3652748" y="11563"/>
+                  </a:lnTo>
+                  <a:lnTo>
+                    <a:pt x="3581126" y="9646"/>
+                  </a:lnTo>
+                  <a:lnTo>
+                    <a:pt x="3509503" y="7726"/>
+                  </a:lnTo>
+                  <a:lnTo>
+                    <a:pt x="3437881" y="5801"/>
+                  </a:lnTo>
+                  <a:lnTo>
+                    <a:pt x="3366258" y="3871"/>
+                  </a:lnTo>
+                  <a:lnTo>
+                    <a:pt x="3294636" y="1938"/>
                   </a:lnTo>
                   <a:lnTo>
                     <a:pt x="3223013" y="0"/>
                   </a:lnTo>
                   <a:lnTo>
-                    <a:pt x="3151391" y="16652"/>
-                  </a:lnTo>
-                  <a:lnTo>
-                    <a:pt x="3079768" y="40504"/>
-                  </a:lnTo>
-                  <a:lnTo>
-                    <a:pt x="3008146" y="63689"/>
-                  </a:lnTo>
-                  <a:lnTo>
-                    <a:pt x="2936523" y="86225"/>
-                  </a:lnTo>
-                  <a:lnTo>
-                    <a:pt x="2864901" y="108130"/>
-                  </a:lnTo>
-                  <a:lnTo>
-                    <a:pt x="2793278" y="129422"/>
-                  </a:lnTo>
-                  <a:lnTo>
-                    <a:pt x="2721655" y="150118"/>
-                  </a:lnTo>
-                  <a:lnTo>
-                    <a:pt x="2650033" y="170235"/>
-                  </a:lnTo>
-                  <a:lnTo>
-                    <a:pt x="2578410" y="189789"/>
-                  </a:lnTo>
-                  <a:lnTo>
-                    <a:pt x="2506788" y="208796"/>
-                  </a:lnTo>
-                  <a:lnTo>
-                    <a:pt x="2435165" y="227270"/>
-                  </a:lnTo>
-                  <a:lnTo>
-                    <a:pt x="2363543" y="245228"/>
-                  </a:lnTo>
-                  <a:lnTo>
-                    <a:pt x="2291920" y="262683"/>
-                  </a:lnTo>
-                  <a:lnTo>
-                    <a:pt x="2220298" y="279650"/>
-                  </a:lnTo>
-                  <a:lnTo>
-                    <a:pt x="2148675" y="296141"/>
-                  </a:lnTo>
-                  <a:lnTo>
-                    <a:pt x="2077053" y="312171"/>
-                  </a:lnTo>
-                  <a:lnTo>
-                    <a:pt x="2005430" y="327753"/>
-                  </a:lnTo>
-                  <a:lnTo>
-                    <a:pt x="1933808" y="342898"/>
-                  </a:lnTo>
-                  <a:lnTo>
-                    <a:pt x="1862185" y="357619"/>
-                  </a:lnTo>
-                  <a:lnTo>
-                    <a:pt x="1790563" y="371929"/>
-                  </a:lnTo>
-                  <a:lnTo>
-                    <a:pt x="1718940" y="385838"/>
-                  </a:lnTo>
-                  <a:lnTo>
-                    <a:pt x="1647318" y="399358"/>
-                  </a:lnTo>
-                  <a:lnTo>
-                    <a:pt x="1575695" y="412499"/>
-                  </a:lnTo>
-                  <a:lnTo>
-                    <a:pt x="1504073" y="425272"/>
-                  </a:lnTo>
-                  <a:lnTo>
-                    <a:pt x="1432450" y="437688"/>
-                  </a:lnTo>
-                  <a:lnTo>
-                    <a:pt x="1360827" y="449757"/>
-                  </a:lnTo>
-                  <a:lnTo>
-                    <a:pt x="1289205" y="461487"/>
-                  </a:lnTo>
-                  <a:lnTo>
-                    <a:pt x="1217582" y="472890"/>
-                  </a:lnTo>
-                  <a:lnTo>
-                    <a:pt x="1145960" y="483973"/>
-                  </a:lnTo>
-                  <a:lnTo>
-                    <a:pt x="1074337" y="494746"/>
-                  </a:lnTo>
-                  <a:lnTo>
-                    <a:pt x="1002715" y="505218"/>
-                  </a:lnTo>
-                  <a:lnTo>
-                    <a:pt x="931092" y="515396"/>
-                  </a:lnTo>
-                  <a:lnTo>
-                    <a:pt x="859470" y="525290"/>
-                  </a:lnTo>
-                  <a:lnTo>
-                    <a:pt x="787847" y="534907"/>
-                  </a:lnTo>
-                  <a:lnTo>
-                    <a:pt x="716225" y="544254"/>
-                  </a:lnTo>
-                  <a:lnTo>
-                    <a:pt x="644602" y="553340"/>
-                  </a:lnTo>
-                  <a:lnTo>
-                    <a:pt x="572980" y="562172"/>
-                  </a:lnTo>
-                  <a:lnTo>
-                    <a:pt x="501357" y="570756"/>
-                  </a:lnTo>
-                  <a:lnTo>
-                    <a:pt x="429735" y="579100"/>
-                  </a:lnTo>
-                  <a:lnTo>
-                    <a:pt x="358112" y="587211"/>
-                  </a:lnTo>
-                  <a:lnTo>
-                    <a:pt x="286490" y="595095"/>
-                  </a:lnTo>
-                  <a:lnTo>
-                    <a:pt x="214867" y="602758"/>
-                  </a:lnTo>
-                  <a:lnTo>
-                    <a:pt x="143245" y="610206"/>
-                  </a:lnTo>
-                  <a:lnTo>
-                    <a:pt x="71622" y="617446"/>
-                  </a:lnTo>
-                  <a:lnTo>
-                    <a:pt x="0" y="624484"/>
+                    <a:pt x="3151391" y="2151"/>
+                  </a:lnTo>
+                  <a:lnTo>
+                    <a:pt x="3079768" y="27390"/>
+                  </a:lnTo>
+                  <a:lnTo>
+                    <a:pt x="3008146" y="51894"/>
+                  </a:lnTo>
+                  <a:lnTo>
+                    <a:pt x="2936523" y="75684"/>
+                  </a:lnTo>
+                  <a:lnTo>
+                    <a:pt x="2864901" y="98780"/>
+                  </a:lnTo>
+                  <a:lnTo>
+                    <a:pt x="2793278" y="121203"/>
+                  </a:lnTo>
+                  <a:lnTo>
+                    <a:pt x="2721655" y="142972"/>
+                  </a:lnTo>
+                  <a:lnTo>
+                    <a:pt x="2650033" y="164107"/>
+                  </a:lnTo>
+                  <a:lnTo>
+                    <a:pt x="2578410" y="184626"/>
+                  </a:lnTo>
+                  <a:lnTo>
+                    <a:pt x="2506788" y="204546"/>
+                  </a:lnTo>
+                  <a:lnTo>
+                    <a:pt x="2435165" y="223886"/>
+                  </a:lnTo>
+                  <a:lnTo>
+                    <a:pt x="2363543" y="242662"/>
+                  </a:lnTo>
+                  <a:lnTo>
+                    <a:pt x="2291920" y="260891"/>
+                  </a:lnTo>
+                  <a:lnTo>
+                    <a:pt x="2220298" y="278589"/>
+                  </a:lnTo>
+                  <a:lnTo>
+                    <a:pt x="2148675" y="295770"/>
+                  </a:lnTo>
+                  <a:lnTo>
+                    <a:pt x="2077053" y="312451"/>
+                  </a:lnTo>
+                  <a:lnTo>
+                    <a:pt x="2005430" y="328646"/>
+                  </a:lnTo>
+                  <a:lnTo>
+                    <a:pt x="1933808" y="344368"/>
+                  </a:lnTo>
+                  <a:lnTo>
+                    <a:pt x="1862185" y="359633"/>
+                  </a:lnTo>
+                  <a:lnTo>
+                    <a:pt x="1790563" y="374452"/>
+                  </a:lnTo>
+                  <a:lnTo>
+                    <a:pt x="1718940" y="388839"/>
+                  </a:lnTo>
+                  <a:lnTo>
+                    <a:pt x="1647318" y="402807"/>
+                  </a:lnTo>
+                  <a:lnTo>
+                    <a:pt x="1575695" y="416368"/>
+                  </a:lnTo>
+                  <a:lnTo>
+                    <a:pt x="1504073" y="429533"/>
+                  </a:lnTo>
+                  <a:lnTo>
+                    <a:pt x="1432450" y="442315"/>
+                  </a:lnTo>
+                  <a:lnTo>
+                    <a:pt x="1360827" y="454724"/>
+                  </a:lnTo>
+                  <a:lnTo>
+                    <a:pt x="1289205" y="466771"/>
+                  </a:lnTo>
+                  <a:lnTo>
+                    <a:pt x="1217582" y="478468"/>
+                  </a:lnTo>
+                  <a:lnTo>
+                    <a:pt x="1145960" y="489823"/>
+                  </a:lnTo>
+                  <a:lnTo>
+                    <a:pt x="1074337" y="500847"/>
+                  </a:lnTo>
+                  <a:lnTo>
+                    <a:pt x="1002715" y="511550"/>
+                  </a:lnTo>
+                  <a:lnTo>
+                    <a:pt x="931092" y="521941"/>
+                  </a:lnTo>
+                  <a:lnTo>
+                    <a:pt x="859470" y="532029"/>
+                  </a:lnTo>
+                  <a:lnTo>
+                    <a:pt x="787847" y="541823"/>
+                  </a:lnTo>
+                  <a:lnTo>
+                    <a:pt x="716225" y="551332"/>
+                  </a:lnTo>
+                  <a:lnTo>
+                    <a:pt x="644602" y="560563"/>
+                  </a:lnTo>
+                  <a:lnTo>
+                    <a:pt x="572980" y="569525"/>
+                  </a:lnTo>
+                  <a:lnTo>
+                    <a:pt x="501357" y="578226"/>
+                  </a:lnTo>
+                  <a:lnTo>
+                    <a:pt x="429735" y="586674"/>
+                  </a:lnTo>
+                  <a:lnTo>
+                    <a:pt x="358112" y="594875"/>
+                  </a:lnTo>
+                  <a:lnTo>
+                    <a:pt x="286490" y="602837"/>
+                  </a:lnTo>
+                  <a:lnTo>
+                    <a:pt x="214867" y="610567"/>
+                  </a:lnTo>
+                  <a:lnTo>
+                    <a:pt x="143245" y="618072"/>
+                  </a:lnTo>
+                  <a:lnTo>
+                    <a:pt x="71622" y="625358"/>
+                  </a:lnTo>
+                  <a:lnTo>
+                    <a:pt x="0" y="632431"/>
                   </a:lnTo>
                 </a:path>
               </a:pathLst>
@@ -4225,309 +4207,309 @@
           </p:nvSpPr>
           <p:spPr>
             <a:xfrm>
-              <a:off x="1172049" y="3823565"/>
-              <a:ext cx="7090630" cy="1231052"/>
+              <a:off x="1172049" y="3708045"/>
+              <a:ext cx="7090630" cy="1365621"/>
             </a:xfrm>
             <a:custGeom>
               <a:avLst/>
               <a:pathLst>
-                <a:path w="7090630" h="1231052">
+                <a:path w="7090630" h="1365621">
                   <a:moveTo>
-                    <a:pt x="0" y="1231052"/>
+                    <a:pt x="0" y="1365621"/>
                   </a:moveTo>
                   <a:lnTo>
-                    <a:pt x="71622" y="1224770"/>
-                  </a:lnTo>
-                  <a:lnTo>
-                    <a:pt x="143245" y="1218407"/>
-                  </a:lnTo>
-                  <a:lnTo>
-                    <a:pt x="214867" y="1211964"/>
-                  </a:lnTo>
-                  <a:lnTo>
-                    <a:pt x="286490" y="1205439"/>
-                  </a:lnTo>
-                  <a:lnTo>
-                    <a:pt x="358112" y="1198831"/>
-                  </a:lnTo>
-                  <a:lnTo>
-                    <a:pt x="429735" y="1192140"/>
-                  </a:lnTo>
-                  <a:lnTo>
-                    <a:pt x="501357" y="1185363"/>
-                  </a:lnTo>
-                  <a:lnTo>
-                    <a:pt x="572980" y="1178500"/>
-                  </a:lnTo>
-                  <a:lnTo>
-                    <a:pt x="644602" y="1171550"/>
-                  </a:lnTo>
-                  <a:lnTo>
-                    <a:pt x="716225" y="1164512"/>
-                  </a:lnTo>
-                  <a:lnTo>
-                    <a:pt x="787847" y="1157384"/>
-                  </a:lnTo>
-                  <a:lnTo>
-                    <a:pt x="859470" y="1150165"/>
-                  </a:lnTo>
-                  <a:lnTo>
-                    <a:pt x="931092" y="1142856"/>
-                  </a:lnTo>
-                  <a:lnTo>
-                    <a:pt x="1002715" y="1135453"/>
-                  </a:lnTo>
-                  <a:lnTo>
-                    <a:pt x="1074337" y="1127956"/>
-                  </a:lnTo>
-                  <a:lnTo>
-                    <a:pt x="1145960" y="1120364"/>
-                  </a:lnTo>
-                  <a:lnTo>
-                    <a:pt x="1217582" y="1112675"/>
-                  </a:lnTo>
-                  <a:lnTo>
-                    <a:pt x="1289205" y="1104889"/>
-                  </a:lnTo>
-                  <a:lnTo>
-                    <a:pt x="1360827" y="1097004"/>
-                  </a:lnTo>
-                  <a:lnTo>
-                    <a:pt x="1432450" y="1089019"/>
-                  </a:lnTo>
-                  <a:lnTo>
-                    <a:pt x="1504073" y="1080932"/>
-                  </a:lnTo>
-                  <a:lnTo>
-                    <a:pt x="1575695" y="1072742"/>
-                  </a:lnTo>
-                  <a:lnTo>
-                    <a:pt x="1647318" y="1064449"/>
-                  </a:lnTo>
-                  <a:lnTo>
-                    <a:pt x="1718940" y="1056050"/>
-                  </a:lnTo>
-                  <a:lnTo>
-                    <a:pt x="1790563" y="1047545"/>
-                  </a:lnTo>
-                  <a:lnTo>
-                    <a:pt x="1862185" y="1038931"/>
-                  </a:lnTo>
-                  <a:lnTo>
-                    <a:pt x="1933808" y="1030208"/>
-                  </a:lnTo>
-                  <a:lnTo>
-                    <a:pt x="2005430" y="1021375"/>
-                  </a:lnTo>
-                  <a:lnTo>
-                    <a:pt x="2077053" y="1012429"/>
-                  </a:lnTo>
-                  <a:lnTo>
-                    <a:pt x="2148675" y="1003369"/>
-                  </a:lnTo>
-                  <a:lnTo>
-                    <a:pt x="2220298" y="994194"/>
-                  </a:lnTo>
-                  <a:lnTo>
-                    <a:pt x="2291920" y="984903"/>
-                  </a:lnTo>
-                  <a:lnTo>
-                    <a:pt x="2363543" y="975494"/>
-                  </a:lnTo>
-                  <a:lnTo>
-                    <a:pt x="2435165" y="965965"/>
-                  </a:lnTo>
-                  <a:lnTo>
-                    <a:pt x="2506788" y="956315"/>
-                  </a:lnTo>
-                  <a:lnTo>
-                    <a:pt x="2578410" y="946543"/>
-                  </a:lnTo>
-                  <a:lnTo>
-                    <a:pt x="2650033" y="936647"/>
-                  </a:lnTo>
-                  <a:lnTo>
-                    <a:pt x="2721655" y="926624"/>
-                  </a:lnTo>
-                  <a:lnTo>
-                    <a:pt x="2793278" y="916475"/>
-                  </a:lnTo>
-                  <a:lnTo>
-                    <a:pt x="2864901" y="906196"/>
-                  </a:lnTo>
-                  <a:lnTo>
-                    <a:pt x="2936523" y="895787"/>
-                  </a:lnTo>
-                  <a:lnTo>
-                    <a:pt x="3008146" y="885246"/>
-                  </a:lnTo>
-                  <a:lnTo>
-                    <a:pt x="3079768" y="874571"/>
-                  </a:lnTo>
-                  <a:lnTo>
-                    <a:pt x="3151391" y="863760"/>
-                  </a:lnTo>
-                  <a:lnTo>
-                    <a:pt x="3223013" y="852812"/>
-                  </a:lnTo>
-                  <a:lnTo>
-                    <a:pt x="3294636" y="841725"/>
-                  </a:lnTo>
-                  <a:lnTo>
-                    <a:pt x="3366258" y="830497"/>
-                  </a:lnTo>
-                  <a:lnTo>
-                    <a:pt x="3437881" y="819127"/>
-                  </a:lnTo>
-                  <a:lnTo>
-                    <a:pt x="3509503" y="807612"/>
-                  </a:lnTo>
-                  <a:lnTo>
-                    <a:pt x="3581126" y="795951"/>
-                  </a:lnTo>
-                  <a:lnTo>
-                    <a:pt x="3652748" y="784141"/>
-                  </a:lnTo>
-                  <a:lnTo>
-                    <a:pt x="3724371" y="772182"/>
-                  </a:lnTo>
-                  <a:lnTo>
-                    <a:pt x="3795993" y="760070"/>
-                  </a:lnTo>
-                  <a:lnTo>
-                    <a:pt x="3867616" y="747805"/>
-                  </a:lnTo>
-                  <a:lnTo>
-                    <a:pt x="3939238" y="735384"/>
-                  </a:lnTo>
-                  <a:lnTo>
-                    <a:pt x="4010861" y="722806"/>
-                  </a:lnTo>
-                  <a:lnTo>
-                    <a:pt x="4082483" y="710067"/>
-                  </a:lnTo>
-                  <a:lnTo>
-                    <a:pt x="4154106" y="697167"/>
-                  </a:lnTo>
-                  <a:lnTo>
-                    <a:pt x="4225729" y="684103"/>
-                  </a:lnTo>
-                  <a:lnTo>
-                    <a:pt x="4297351" y="670872"/>
-                  </a:lnTo>
-                  <a:lnTo>
-                    <a:pt x="4368974" y="657474"/>
-                  </a:lnTo>
-                  <a:lnTo>
-                    <a:pt x="4440596" y="643906"/>
-                  </a:lnTo>
-                  <a:lnTo>
-                    <a:pt x="4512219" y="630165"/>
-                  </a:lnTo>
-                  <a:lnTo>
-                    <a:pt x="4583841" y="616250"/>
-                  </a:lnTo>
-                  <a:lnTo>
-                    <a:pt x="4655464" y="602158"/>
-                  </a:lnTo>
-                  <a:lnTo>
-                    <a:pt x="4727086" y="587887"/>
-                  </a:lnTo>
-                  <a:lnTo>
-                    <a:pt x="4798709" y="573434"/>
-                  </a:lnTo>
-                  <a:lnTo>
-                    <a:pt x="4870331" y="558798"/>
-                  </a:lnTo>
-                  <a:lnTo>
-                    <a:pt x="4941954" y="543977"/>
-                  </a:lnTo>
-                  <a:lnTo>
-                    <a:pt x="5013576" y="528967"/>
-                  </a:lnTo>
-                  <a:lnTo>
-                    <a:pt x="5085199" y="513766"/>
-                  </a:lnTo>
-                  <a:lnTo>
-                    <a:pt x="5156821" y="498372"/>
-                  </a:lnTo>
-                  <a:lnTo>
-                    <a:pt x="5228444" y="482783"/>
-                  </a:lnTo>
-                  <a:lnTo>
-                    <a:pt x="5300066" y="466995"/>
-                  </a:lnTo>
-                  <a:lnTo>
-                    <a:pt x="5371689" y="451007"/>
-                  </a:lnTo>
-                  <a:lnTo>
-                    <a:pt x="5443311" y="434816"/>
-                  </a:lnTo>
-                  <a:lnTo>
-                    <a:pt x="5514934" y="418419"/>
-                  </a:lnTo>
-                  <a:lnTo>
-                    <a:pt x="5586557" y="401815"/>
-                  </a:lnTo>
-                  <a:lnTo>
-                    <a:pt x="5658179" y="384999"/>
-                  </a:lnTo>
-                  <a:lnTo>
-                    <a:pt x="5729802" y="367969"/>
-                  </a:lnTo>
-                  <a:lnTo>
-                    <a:pt x="5801424" y="350723"/>
-                  </a:lnTo>
-                  <a:lnTo>
-                    <a:pt x="5873047" y="333258"/>
-                  </a:lnTo>
-                  <a:lnTo>
-                    <a:pt x="5944669" y="315572"/>
-                  </a:lnTo>
-                  <a:lnTo>
-                    <a:pt x="6016292" y="297660"/>
-                  </a:lnTo>
-                  <a:lnTo>
-                    <a:pt x="6087914" y="279521"/>
-                  </a:lnTo>
-                  <a:lnTo>
-                    <a:pt x="6159537" y="261152"/>
-                  </a:lnTo>
-                  <a:lnTo>
-                    <a:pt x="6231159" y="242549"/>
-                  </a:lnTo>
-                  <a:lnTo>
-                    <a:pt x="6302782" y="223710"/>
-                  </a:lnTo>
-                  <a:lnTo>
-                    <a:pt x="6374404" y="204632"/>
-                  </a:lnTo>
-                  <a:lnTo>
-                    <a:pt x="6446027" y="185311"/>
-                  </a:lnTo>
-                  <a:lnTo>
-                    <a:pt x="6517649" y="165745"/>
-                  </a:lnTo>
-                  <a:lnTo>
-                    <a:pt x="6589272" y="145931"/>
-                  </a:lnTo>
-                  <a:lnTo>
-                    <a:pt x="6660894" y="125865"/>
-                  </a:lnTo>
-                  <a:lnTo>
-                    <a:pt x="6732517" y="105543"/>
-                  </a:lnTo>
-                  <a:lnTo>
-                    <a:pt x="6804139" y="84964"/>
-                  </a:lnTo>
-                  <a:lnTo>
-                    <a:pt x="6875762" y="64123"/>
-                  </a:lnTo>
-                  <a:lnTo>
-                    <a:pt x="6947385" y="43018"/>
-                  </a:lnTo>
-                  <a:lnTo>
-                    <a:pt x="7019007" y="21645"/>
+                    <a:pt x="71622" y="1359074"/>
+                  </a:lnTo>
+                  <a:lnTo>
+                    <a:pt x="143245" y="1352437"/>
+                  </a:lnTo>
+                  <a:lnTo>
+                    <a:pt x="214867" y="1345709"/>
+                  </a:lnTo>
+                  <a:lnTo>
+                    <a:pt x="286490" y="1338887"/>
+                  </a:lnTo>
+                  <a:lnTo>
+                    <a:pt x="358112" y="1331972"/>
+                  </a:lnTo>
+                  <a:lnTo>
+                    <a:pt x="429735" y="1324962"/>
+                  </a:lnTo>
+                  <a:lnTo>
+                    <a:pt x="501357" y="1317855"/>
+                  </a:lnTo>
+                  <a:lnTo>
+                    <a:pt x="572980" y="1310650"/>
+                  </a:lnTo>
+                  <a:lnTo>
+                    <a:pt x="644602" y="1303346"/>
+                  </a:lnTo>
+                  <a:lnTo>
+                    <a:pt x="716225" y="1295942"/>
+                  </a:lnTo>
+                  <a:lnTo>
+                    <a:pt x="787847" y="1288436"/>
+                  </a:lnTo>
+                  <a:lnTo>
+                    <a:pt x="859470" y="1280826"/>
+                  </a:lnTo>
+                  <a:lnTo>
+                    <a:pt x="931092" y="1273111"/>
+                  </a:lnTo>
+                  <a:lnTo>
+                    <a:pt x="1002715" y="1265291"/>
+                  </a:lnTo>
+                  <a:lnTo>
+                    <a:pt x="1074337" y="1257362"/>
+                  </a:lnTo>
+                  <a:lnTo>
+                    <a:pt x="1145960" y="1249325"/>
+                  </a:lnTo>
+                  <a:lnTo>
+                    <a:pt x="1217582" y="1241176"/>
+                  </a:lnTo>
+                  <a:lnTo>
+                    <a:pt x="1289205" y="1232916"/>
+                  </a:lnTo>
+                  <a:lnTo>
+                    <a:pt x="1360827" y="1224542"/>
+                  </a:lnTo>
+                  <a:lnTo>
+                    <a:pt x="1432450" y="1216053"/>
+                  </a:lnTo>
+                  <a:lnTo>
+                    <a:pt x="1504073" y="1207446"/>
+                  </a:lnTo>
+                  <a:lnTo>
+                    <a:pt x="1575695" y="1198722"/>
+                  </a:lnTo>
+                  <a:lnTo>
+                    <a:pt x="1647318" y="1189877"/>
+                  </a:lnTo>
+                  <a:lnTo>
+                    <a:pt x="1718940" y="1180910"/>
+                  </a:lnTo>
+                  <a:lnTo>
+                    <a:pt x="1790563" y="1171820"/>
+                  </a:lnTo>
+                  <a:lnTo>
+                    <a:pt x="1862185" y="1162605"/>
+                  </a:lnTo>
+                  <a:lnTo>
+                    <a:pt x="1933808" y="1153262"/>
+                  </a:lnTo>
+                  <a:lnTo>
+                    <a:pt x="2005430" y="1143792"/>
+                  </a:lnTo>
+                  <a:lnTo>
+                    <a:pt x="2077053" y="1134191"/>
+                  </a:lnTo>
+                  <a:lnTo>
+                    <a:pt x="2148675" y="1124457"/>
+                  </a:lnTo>
+                  <a:lnTo>
+                    <a:pt x="2220298" y="1114590"/>
+                  </a:lnTo>
+                  <a:lnTo>
+                    <a:pt x="2291920" y="1104587"/>
+                  </a:lnTo>
+                  <a:lnTo>
+                    <a:pt x="2363543" y="1094446"/>
+                  </a:lnTo>
+                  <a:lnTo>
+                    <a:pt x="2435165" y="1084165"/>
+                  </a:lnTo>
+                  <a:lnTo>
+                    <a:pt x="2506788" y="1073743"/>
+                  </a:lnTo>
+                  <a:lnTo>
+                    <a:pt x="2578410" y="1063178"/>
+                  </a:lnTo>
+                  <a:lnTo>
+                    <a:pt x="2650033" y="1052467"/>
+                  </a:lnTo>
+                  <a:lnTo>
+                    <a:pt x="2721655" y="1041608"/>
+                  </a:lnTo>
+                  <a:lnTo>
+                    <a:pt x="2793278" y="1030600"/>
+                  </a:lnTo>
+                  <a:lnTo>
+                    <a:pt x="2864901" y="1019441"/>
+                  </a:lnTo>
+                  <a:lnTo>
+                    <a:pt x="2936523" y="1008127"/>
+                  </a:lnTo>
+                  <a:lnTo>
+                    <a:pt x="3008146" y="996658"/>
+                  </a:lnTo>
+                  <a:lnTo>
+                    <a:pt x="3079768" y="985032"/>
+                  </a:lnTo>
+                  <a:lnTo>
+                    <a:pt x="3151391" y="973245"/>
+                  </a:lnTo>
+                  <a:lnTo>
+                    <a:pt x="3223013" y="961296"/>
+                  </a:lnTo>
+                  <a:lnTo>
+                    <a:pt x="3294636" y="949182"/>
+                  </a:lnTo>
+                  <a:lnTo>
+                    <a:pt x="3366258" y="936901"/>
+                  </a:lnTo>
+                  <a:lnTo>
+                    <a:pt x="3437881" y="924452"/>
+                  </a:lnTo>
+                  <a:lnTo>
+                    <a:pt x="3509503" y="911831"/>
+                  </a:lnTo>
+                  <a:lnTo>
+                    <a:pt x="3581126" y="899036"/>
+                  </a:lnTo>
+                  <a:lnTo>
+                    <a:pt x="3652748" y="886065"/>
+                  </a:lnTo>
+                  <a:lnTo>
+                    <a:pt x="3724371" y="872916"/>
+                  </a:lnTo>
+                  <a:lnTo>
+                    <a:pt x="3795993" y="859585"/>
+                  </a:lnTo>
+                  <a:lnTo>
+                    <a:pt x="3867616" y="846071"/>
+                  </a:lnTo>
+                  <a:lnTo>
+                    <a:pt x="3939238" y="832371"/>
+                  </a:lnTo>
+                  <a:lnTo>
+                    <a:pt x="4010861" y="818483"/>
+                  </a:lnTo>
+                  <a:lnTo>
+                    <a:pt x="4082483" y="804403"/>
+                  </a:lnTo>
+                  <a:lnTo>
+                    <a:pt x="4154106" y="790129"/>
+                  </a:lnTo>
+                  <a:lnTo>
+                    <a:pt x="4225729" y="775659"/>
+                  </a:lnTo>
+                  <a:lnTo>
+                    <a:pt x="4297351" y="760989"/>
+                  </a:lnTo>
+                  <a:lnTo>
+                    <a:pt x="4368974" y="746118"/>
+                  </a:lnTo>
+                  <a:lnTo>
+                    <a:pt x="4440596" y="731042"/>
+                  </a:lnTo>
+                  <a:lnTo>
+                    <a:pt x="4512219" y="715758"/>
+                  </a:lnTo>
+                  <a:lnTo>
+                    <a:pt x="4583841" y="700264"/>
+                  </a:lnTo>
+                  <a:lnTo>
+                    <a:pt x="4655464" y="684556"/>
+                  </a:lnTo>
+                  <a:lnTo>
+                    <a:pt x="4727086" y="668632"/>
+                  </a:lnTo>
+                  <a:lnTo>
+                    <a:pt x="4798709" y="652489"/>
+                  </a:lnTo>
+                  <a:lnTo>
+                    <a:pt x="4870331" y="636124"/>
+                  </a:lnTo>
+                  <a:lnTo>
+                    <a:pt x="4941954" y="619534"/>
+                  </a:lnTo>
+                  <a:lnTo>
+                    <a:pt x="5013576" y="602715"/>
+                  </a:lnTo>
+                  <a:lnTo>
+                    <a:pt x="5085199" y="585664"/>
+                  </a:lnTo>
+                  <a:lnTo>
+                    <a:pt x="5156821" y="568379"/>
+                  </a:lnTo>
+                  <a:lnTo>
+                    <a:pt x="5228444" y="550856"/>
+                  </a:lnTo>
+                  <a:lnTo>
+                    <a:pt x="5300066" y="533091"/>
+                  </a:lnTo>
+                  <a:lnTo>
+                    <a:pt x="5371689" y="515082"/>
+                  </a:lnTo>
+                  <a:lnTo>
+                    <a:pt x="5443311" y="496825"/>
+                  </a:lnTo>
+                  <a:lnTo>
+                    <a:pt x="5514934" y="478317"/>
+                  </a:lnTo>
+                  <a:lnTo>
+                    <a:pt x="5586557" y="459553"/>
+                  </a:lnTo>
+                  <a:lnTo>
+                    <a:pt x="5658179" y="440532"/>
+                  </a:lnTo>
+                  <a:lnTo>
+                    <a:pt x="5729802" y="421249"/>
+                  </a:lnTo>
+                  <a:lnTo>
+                    <a:pt x="5801424" y="401700"/>
+                  </a:lnTo>
+                  <a:lnTo>
+                    <a:pt x="5873047" y="381882"/>
+                  </a:lnTo>
+                  <a:lnTo>
+                    <a:pt x="5944669" y="361791"/>
+                  </a:lnTo>
+                  <a:lnTo>
+                    <a:pt x="6016292" y="341423"/>
+                  </a:lnTo>
+                  <a:lnTo>
+                    <a:pt x="6087914" y="320775"/>
+                  </a:lnTo>
+                  <a:lnTo>
+                    <a:pt x="6159537" y="299843"/>
+                  </a:lnTo>
+                  <a:lnTo>
+                    <a:pt x="6231159" y="278623"/>
+                  </a:lnTo>
+                  <a:lnTo>
+                    <a:pt x="6302782" y="257110"/>
+                  </a:lnTo>
+                  <a:lnTo>
+                    <a:pt x="6374404" y="235302"/>
+                  </a:lnTo>
+                  <a:lnTo>
+                    <a:pt x="6446027" y="213193"/>
+                  </a:lnTo>
+                  <a:lnTo>
+                    <a:pt x="6517649" y="190779"/>
+                  </a:lnTo>
+                  <a:lnTo>
+                    <a:pt x="6589272" y="168057"/>
+                  </a:lnTo>
+                  <a:lnTo>
+                    <a:pt x="6660894" y="145023"/>
+                  </a:lnTo>
+                  <a:lnTo>
+                    <a:pt x="6732517" y="121671"/>
+                  </a:lnTo>
+                  <a:lnTo>
+                    <a:pt x="6804139" y="97997"/>
+                  </a:lnTo>
+                  <a:lnTo>
+                    <a:pt x="6875762" y="73998"/>
+                  </a:lnTo>
+                  <a:lnTo>
+                    <a:pt x="6947385" y="49668"/>
+                  </a:lnTo>
+                  <a:lnTo>
+                    <a:pt x="7019007" y="25004"/>
                   </a:lnTo>
                   <a:lnTo>
                     <a:pt x="7090630" y="0"/>
@@ -4602,7 +4584,7 @@
           </p:nvSpPr>
           <p:spPr>
             <a:xfrm>
-              <a:off x="4374536" y="1896563"/>
+              <a:off x="4334057" y="1896563"/>
               <a:ext cx="0" cy="3826579"/>
             </a:xfrm>
             <a:custGeom>
@@ -4875,7 +4857,7 @@
           </p:nvSpPr>
           <p:spPr>
             <a:xfrm>
-              <a:off x="2009531" y="5785772"/>
+              <a:off x="2008892" y="5785772"/>
               <a:ext cx="223753" cy="80101"/>
             </a:xfrm>
             <a:prstGeom prst="rect">
@@ -4921,7 +4903,7 @@
           </p:nvSpPr>
           <p:spPr>
             <a:xfrm>
-              <a:off x="4372762" y="5785772"/>
+              <a:off x="4369739" y="5785772"/>
               <a:ext cx="62179" cy="80101"/>
             </a:xfrm>
             <a:prstGeom prst="rect">
@@ -4967,7 +4949,7 @@
           </p:nvSpPr>
           <p:spPr>
             <a:xfrm>
-              <a:off x="6593026" y="5785772"/>
+              <a:off x="6587619" y="5785772"/>
               <a:ext cx="186537" cy="80101"/>
             </a:xfrm>
             <a:prstGeom prst="rect">
